--- a/courses/build/farmer-5day/F-D2.pptx
+++ b/courses/build/farmer-5day/F-D2.pptx
@@ -4888,7 +4888,7 @@
     <p:bg>
       <p:bgPr>
         <a:solidFill>
-          <a:srgbClr val="1F4D2B"/>
+          <a:srgbClr val="2F5D34"/>
         </a:solidFill>
         <a:effectLst/>
       </p:bgPr>
@@ -4930,9 +4930,9 @@
             <a:r>
               <a:rPr sz="1000" b="0">
                 <a:solidFill>
-                  <a:srgbClr val="A8D88A"/>
-                </a:solidFill>
-                <a:latin typeface="Arial"/>
+                  <a:srgbClr val="EFE6D2"/>
+                </a:solidFill>
+                <a:latin typeface="Verdana"/>
               </a:rPr>
               <a:t>F-D2-01</a:t>
             </a:r>
@@ -4969,9 +4969,9 @@
             <a:r>
               <a:rPr sz="1000" b="0">
                 <a:solidFill>
-                  <a:srgbClr val="A8D88A"/>
-                </a:solidFill>
-                <a:latin typeface="Arial"/>
+                  <a:srgbClr val="EFE6D2"/>
+                </a:solidFill>
+                <a:latin typeface="Verdana"/>
               </a:rPr>
               <a:t>Grow Food, Grow Strong</a:t>
             </a:r>
@@ -5008,9 +5008,9 @@
             <a:r>
               <a:rPr sz="4800" b="1">
                 <a:solidFill>
-                  <a:srgbClr val="F7F2E9"/>
-                </a:solidFill>
-                <a:latin typeface="Georgia"/>
+                  <a:srgbClr val="EFE6D2"/>
+                </a:solidFill>
+                <a:latin typeface="Rockwell"/>
               </a:rPr>
               <a:t>Day 2 · Water</a:t>
             </a:r>
@@ -5032,7 +5032,7 @@
             <a:avLst/>
           </a:prstGeom>
           <a:solidFill>
-            <a:srgbClr val="C07A1E"/>
+            <a:srgbClr val="B24E2A"/>
           </a:solidFill>
           <a:ln>
             <a:noFill/>
@@ -5091,9 +5091,9 @@
             <a:r>
               <a:rPr sz="2400" b="0">
                 <a:solidFill>
-                  <a:srgbClr val="A8D88A"/>
-                </a:solidFill>
-                <a:latin typeface="Arial"/>
+                  <a:srgbClr val="EFE6D2"/>
+                </a:solidFill>
+                <a:latin typeface="Verdana"/>
               </a:rPr>
               <a:t>Make the rain walk, not run</a:t>
             </a:r>
@@ -5115,11 +5115,11 @@
             <a:avLst/>
           </a:prstGeom>
           <a:solidFill>
-            <a:srgbClr val="FBF6EC"/>
+            <a:srgbClr val="EFE6D2"/>
           </a:solidFill>
           <a:ln w="15875">
             <a:solidFill>
-              <a:srgbClr val="E2D8C4"/>
+              <a:srgbClr val="2F5D34"/>
             </a:solidFill>
           </a:ln>
           <a:effectLst/>
@@ -5176,9 +5176,9 @@
             <a:r>
               <a:rPr sz="1200" b="1">
                 <a:solidFill>
-                  <a:srgbClr val="C07A1E"/>
-                </a:solidFill>
-                <a:latin typeface="Arial"/>
+                  <a:srgbClr val="B24E2A"/>
+                </a:solidFill>
+                <a:latin typeface="Verdana"/>
               </a:rPr>
               <a:t>IMAGE · F-IMG-06 · coming</a:t>
             </a:r>
@@ -5215,9 +5215,9 @@
             <a:r>
               <a:rPr sz="1800" b="1">
                 <a:solidFill>
-                  <a:srgbClr val="1F4D2B"/>
-                </a:solidFill>
-                <a:latin typeface="Georgia"/>
+                  <a:srgbClr val="1B1A17"/>
+                </a:solidFill>
+                <a:latin typeface="Rockwell"/>
               </a:rPr>
               <a:t>Storm on a slope</a:t>
             </a:r>
@@ -5254,9 +5254,9 @@
             <a:r>
               <a:rPr sz="1100" b="0">
                 <a:solidFill>
-                  <a:srgbClr val="20190F"/>
-                </a:solidFill>
-                <a:latin typeface="Arial"/>
+                  <a:srgbClr val="1B1A17"/>
+                </a:solidFill>
+                <a:latin typeface="Verdana"/>
               </a:rPr>
               <a:t>A dark summer storm cloud over a rural homestead on a slope; rain curtains; brown water running along a path.</a:t>
             </a:r>
@@ -5277,7 +5277,7 @@
     <p:bg>
       <p:bgPr>
         <a:solidFill>
-          <a:srgbClr val="F7F2E9"/>
+          <a:srgbClr val="EFE6D2"/>
         </a:solidFill>
         <a:effectLst/>
       </p:bgPr>
@@ -5319,9 +5319,9 @@
             <a:r>
               <a:rPr sz="1000" b="0">
                 <a:solidFill>
-                  <a:srgbClr val="6B6255"/>
-                </a:solidFill>
-                <a:latin typeface="Arial"/>
+                  <a:srgbClr val="1B1A17"/>
+                </a:solidFill>
+                <a:latin typeface="Verdana"/>
               </a:rPr>
               <a:t>F-D2-10</a:t>
             </a:r>
@@ -5358,9 +5358,9 @@
             <a:r>
               <a:rPr sz="1000" b="0">
                 <a:solidFill>
-                  <a:srgbClr val="6B6255"/>
-                </a:solidFill>
-                <a:latin typeface="Arial"/>
+                  <a:srgbClr val="1B1A17"/>
+                </a:solidFill>
+                <a:latin typeface="Verdana"/>
               </a:rPr>
               <a:t>Grow Food, Grow Strong</a:t>
             </a:r>
@@ -5382,7 +5382,7 @@
             <a:avLst/>
           </a:prstGeom>
           <a:solidFill>
-            <a:srgbClr val="C07A1E"/>
+            <a:srgbClr val="B24E2A"/>
           </a:solidFill>
           <a:ln>
             <a:noFill/>
@@ -5441,9 +5441,9 @@
             <a:r>
               <a:rPr sz="1400" b="1">
                 <a:solidFill>
-                  <a:srgbClr val="F7F2E9"/>
-                </a:solidFill>
-                <a:latin typeface="Arial"/>
+                  <a:srgbClr val="EFE6D2"/>
+                </a:solidFill>
+                <a:latin typeface="Verdana"/>
               </a:rPr>
               <a:t>YOUR TURN</a:t>
             </a:r>
@@ -5480,9 +5480,9 @@
             <a:r>
               <a:rPr sz="3800" b="1">
                 <a:solidFill>
-                  <a:srgbClr val="1F4D2B"/>
-                </a:solidFill>
-                <a:latin typeface="Georgia"/>
+                  <a:srgbClr val="1B1A17"/>
+                </a:solidFill>
+                <a:latin typeface="Rockwell"/>
               </a:rPr>
               <a:t>Test it</a:t>
             </a:r>
@@ -5504,7 +5504,7 @@
             <a:avLst/>
           </a:prstGeom>
           <a:solidFill>
-            <a:srgbClr val="E2D8C4"/>
+            <a:srgbClr val="2F5D34"/>
           </a:solidFill>
           <a:ln>
             <a:noFill/>
@@ -5563,9 +5563,9 @@
             <a:r>
               <a:rPr sz="2600" b="1">
                 <a:solidFill>
-                  <a:srgbClr val="20190F"/>
-                </a:solidFill>
-                <a:latin typeface="Arial"/>
+                  <a:srgbClr val="1B1A17"/>
+                </a:solidFill>
+                <a:latin typeface="Verdana"/>
               </a:rPr>
               <a:t>•  Two bottles of water in your section</a:t>
             </a:r>
@@ -5579,9 +5579,9 @@
             <a:r>
               <a:rPr sz="2600" b="1">
                 <a:solidFill>
-                  <a:srgbClr val="20190F"/>
-                </a:solidFill>
-                <a:latin typeface="Arial"/>
+                  <a:srgbClr val="1B1A17"/>
+                </a:solidFill>
+                <a:latin typeface="Verdana"/>
               </a:rPr>
               <a:t>•  Does it spread or run?</a:t>
             </a:r>
@@ -5627,7 +5627,7 @@
             <a:avLst/>
           </a:prstGeom>
           <a:solidFill>
-            <a:srgbClr val="20190F"/>
+            <a:srgbClr val="1B1A17"/>
           </a:solidFill>
           <a:ln>
             <a:noFill/>
@@ -5686,9 +5686,9 @@
             <a:r>
               <a:rPr sz="1100" b="0">
                 <a:solidFill>
-                  <a:srgbClr val="F7F2E9"/>
-                </a:solidFill>
-                <a:latin typeface="Arial"/>
+                  <a:srgbClr val="EFE6D2"/>
+                </a:solidFill>
+                <a:latin typeface="Verdana"/>
               </a:rPr>
               <a:t>▶  Clip F-ANI-09 · play from the tablet: watch-07-swale-overflow-pond.mp4</a:t>
             </a:r>
@@ -5709,7 +5709,7 @@
     <p:bg>
       <p:bgPr>
         <a:solidFill>
-          <a:srgbClr val="F7F2E9"/>
+          <a:srgbClr val="EFE6D2"/>
         </a:solidFill>
         <a:effectLst/>
       </p:bgPr>
@@ -5751,9 +5751,9 @@
             <a:r>
               <a:rPr sz="1000" b="0">
                 <a:solidFill>
-                  <a:srgbClr val="6B6255"/>
-                </a:solidFill>
-                <a:latin typeface="Arial"/>
+                  <a:srgbClr val="1B1A17"/>
+                </a:solidFill>
+                <a:latin typeface="Verdana"/>
               </a:rPr>
               <a:t>F-D2-11   ·   Poster F-P08</a:t>
             </a:r>
@@ -5790,9 +5790,9 @@
             <a:r>
               <a:rPr sz="1000" b="0">
                 <a:solidFill>
-                  <a:srgbClr val="6B6255"/>
-                </a:solidFill>
-                <a:latin typeface="Arial"/>
+                  <a:srgbClr val="1B1A17"/>
+                </a:solidFill>
+                <a:latin typeface="Verdana"/>
               </a:rPr>
               <a:t>Grow Food, Grow Strong</a:t>
             </a:r>
@@ -5829,9 +5829,9 @@
             <a:r>
               <a:rPr sz="3800" b="1">
                 <a:solidFill>
-                  <a:srgbClr val="1F4D2B"/>
-                </a:solidFill>
-                <a:latin typeface="Georgia"/>
+                  <a:srgbClr val="1B1A17"/>
+                </a:solidFill>
+                <a:latin typeface="Rockwell"/>
               </a:rPr>
               <a:t>The magic rule</a:t>
             </a:r>
@@ -5853,7 +5853,7 @@
             <a:avLst/>
           </a:prstGeom>
           <a:solidFill>
-            <a:srgbClr val="E2D8C4"/>
+            <a:srgbClr val="2F5D34"/>
           </a:solidFill>
           <a:ln>
             <a:noFill/>
@@ -5912,9 +5912,9 @@
             <a:r>
               <a:rPr sz="2800" b="0">
                 <a:solidFill>
-                  <a:srgbClr val="20190F"/>
-                </a:solidFill>
-                <a:latin typeface="Arial"/>
+                  <a:srgbClr val="1B1A17"/>
+                </a:solidFill>
+                <a:latin typeface="Verdana"/>
               </a:rPr>
               <a:t>•  1 mm of rain on 1 m² = 1 litre</a:t>
             </a:r>
@@ -5936,11 +5936,11 @@
             <a:avLst/>
           </a:prstGeom>
           <a:solidFill>
-            <a:srgbClr val="FBF6EC"/>
+            <a:srgbClr val="EFE6D2"/>
           </a:solidFill>
           <a:ln w="15875">
             <a:solidFill>
-              <a:srgbClr val="E2D8C4"/>
+              <a:srgbClr val="2F5D34"/>
             </a:solidFill>
           </a:ln>
           <a:effectLst/>
@@ -5997,9 +5997,9 @@
             <a:r>
               <a:rPr sz="1200" b="1">
                 <a:solidFill>
-                  <a:srgbClr val="C07A1E"/>
-                </a:solidFill>
-                <a:latin typeface="Arial"/>
+                  <a:srgbClr val="B24E2A"/>
+                </a:solidFill>
+                <a:latin typeface="Verdana"/>
               </a:rPr>
               <a:t>POSTER ART · F-P08-ART · coming</a:t>
             </a:r>
@@ -6036,9 +6036,9 @@
             <a:r>
               <a:rPr sz="1800" b="1">
                 <a:solidFill>
-                  <a:srgbClr val="1F4D2B"/>
-                </a:solidFill>
-                <a:latin typeface="Georgia"/>
+                  <a:srgbClr val="1B1A17"/>
+                </a:solidFill>
+                <a:latin typeface="Rockwell"/>
               </a:rPr>
               <a:t>Artwork for F-P08 · How much rain from your roof?</a:t>
             </a:r>
@@ -6075,9 +6075,9 @@
             <a:r>
               <a:rPr sz="1100" b="0">
                 <a:solidFill>
-                  <a:srgbClr val="20190F"/>
-                </a:solidFill>
-                <a:latin typeface="Arial"/>
+                  <a:srgbClr val="1B1A17"/>
+                </a:solidFill>
+                <a:latin typeface="Verdana"/>
               </a:rPr>
               <a:t>Top: a single square metre of ground marked with four pegs and string, a rain cloud over it, and one 1-litre bottle beside it. Middle: a simple house with a corrugated roof, a measuring tape along the length and width at ground level, rain falling, and a row of identical 20 ℓ buckets lined up beside a tank. Bottom: a tank close-up — gutter with a gentle…</a:t>
             </a:r>
@@ -6098,7 +6098,7 @@
     <p:bg>
       <p:bgPr>
         <a:solidFill>
-          <a:srgbClr val="F7F2E9"/>
+          <a:srgbClr val="EFE6D2"/>
         </a:solidFill>
         <a:effectLst/>
       </p:bgPr>
@@ -6140,9 +6140,9 @@
             <a:r>
               <a:rPr sz="1000" b="0">
                 <a:solidFill>
-                  <a:srgbClr val="6B6255"/>
-                </a:solidFill>
-                <a:latin typeface="Arial"/>
+                  <a:srgbClr val="1B1A17"/>
+                </a:solidFill>
+                <a:latin typeface="Verdana"/>
               </a:rPr>
               <a:t>F-D2-12</a:t>
             </a:r>
@@ -6179,9 +6179,9 @@
             <a:r>
               <a:rPr sz="1000" b="0">
                 <a:solidFill>
-                  <a:srgbClr val="6B6255"/>
-                </a:solidFill>
-                <a:latin typeface="Arial"/>
+                  <a:srgbClr val="1B1A17"/>
+                </a:solidFill>
+                <a:latin typeface="Verdana"/>
               </a:rPr>
               <a:t>Grow Food, Grow Strong</a:t>
             </a:r>
@@ -6203,7 +6203,7 @@
             <a:avLst/>
           </a:prstGeom>
           <a:solidFill>
-            <a:srgbClr val="C07A1E"/>
+            <a:srgbClr val="B24E2A"/>
           </a:solidFill>
           <a:ln>
             <a:noFill/>
@@ -6262,9 +6262,9 @@
             <a:r>
               <a:rPr sz="1400" b="1">
                 <a:solidFill>
-                  <a:srgbClr val="F7F2E9"/>
-                </a:solidFill>
-                <a:latin typeface="Arial"/>
+                  <a:srgbClr val="EFE6D2"/>
+                </a:solidFill>
+                <a:latin typeface="Verdana"/>
               </a:rPr>
               <a:t>YOUR TURN</a:t>
             </a:r>
@@ -6301,9 +6301,9 @@
             <a:r>
               <a:rPr sz="3800" b="1">
                 <a:solidFill>
-                  <a:srgbClr val="1F4D2B"/>
-                </a:solidFill>
-                <a:latin typeface="Georgia"/>
+                  <a:srgbClr val="1B1A17"/>
+                </a:solidFill>
+                <a:latin typeface="Rockwell"/>
               </a:rPr>
               <a:t>Measure the roof</a:t>
             </a:r>
@@ -6325,7 +6325,7 @@
             <a:avLst/>
           </a:prstGeom>
           <a:solidFill>
-            <a:srgbClr val="E2D8C4"/>
+            <a:srgbClr val="2F5D34"/>
           </a:solidFill>
           <a:ln>
             <a:noFill/>
@@ -6384,9 +6384,9 @@
             <a:r>
               <a:rPr sz="3000" b="1">
                 <a:solidFill>
-                  <a:srgbClr val="20190F"/>
-                </a:solidFill>
-                <a:latin typeface="Arial"/>
+                  <a:srgbClr val="1B1A17"/>
+                </a:solidFill>
+                <a:latin typeface="Verdana"/>
               </a:rPr>
               <a:t>•  Length × width on the ground</a:t>
             </a:r>
@@ -6400,9 +6400,9 @@
             <a:r>
               <a:rPr sz="3000" b="1">
                 <a:solidFill>
-                  <a:srgbClr val="20190F"/>
-                </a:solidFill>
-                <a:latin typeface="Arial"/>
+                  <a:srgbClr val="1B1A17"/>
+                </a:solidFill>
+                <a:latin typeface="Verdana"/>
               </a:rPr>
               <a:t>•  Never climb the roof</a:t>
             </a:r>
@@ -6424,11 +6424,11 @@
             <a:avLst/>
           </a:prstGeom>
           <a:solidFill>
-            <a:srgbClr val="FBF6EC"/>
+            <a:srgbClr val="EFE6D2"/>
           </a:solidFill>
           <a:ln w="15875">
             <a:solidFill>
-              <a:srgbClr val="E2D8C4"/>
+              <a:srgbClr val="2F5D34"/>
             </a:solidFill>
           </a:ln>
           <a:effectLst/>
@@ -6485,9 +6485,9 @@
             <a:r>
               <a:rPr sz="1200" b="1">
                 <a:solidFill>
-                  <a:srgbClr val="C07A1E"/>
-                </a:solidFill>
-                <a:latin typeface="Arial"/>
+                  <a:srgbClr val="B24E2A"/>
+                </a:solidFill>
+                <a:latin typeface="Verdana"/>
               </a:rPr>
               <a:t>IMAGE · F-IMG-11 · coming</a:t>
             </a:r>
@@ -6524,9 +6524,9 @@
             <a:r>
               <a:rPr sz="1800" b="1">
                 <a:solidFill>
-                  <a:srgbClr val="1F4D2B"/>
-                </a:solidFill>
-                <a:latin typeface="Georgia"/>
+                  <a:srgbClr val="1B1A17"/>
+                </a:solidFill>
+                <a:latin typeface="Rockwell"/>
               </a:rPr>
               <a:t>Measuring the roof</a:t>
             </a:r>
@@ -6563,9 +6563,9 @@
             <a:r>
               <a:rPr sz="1100" b="0">
                 <a:solidFill>
-                  <a:srgbClr val="20190F"/>
-                </a:solidFill>
-                <a:latin typeface="Arial"/>
+                  <a:srgbClr val="1B1A17"/>
+                </a:solidFill>
+                <a:latin typeface="Verdana"/>
               </a:rPr>
               <a:t>Two learners stretching a knotted string along the ground under the edge of a corrugated-iron roof of a hall; a third counting knots.</a:t>
             </a:r>
@@ -6586,7 +6586,7 @@
     <p:bg>
       <p:bgPr>
         <a:solidFill>
-          <a:srgbClr val="F7F2E9"/>
+          <a:srgbClr val="EFE6D2"/>
         </a:solidFill>
         <a:effectLst/>
       </p:bgPr>
@@ -6628,9 +6628,9 @@
             <a:r>
               <a:rPr sz="1000" b="0">
                 <a:solidFill>
-                  <a:srgbClr val="6B6255"/>
-                </a:solidFill>
-                <a:latin typeface="Arial"/>
+                  <a:srgbClr val="1B1A17"/>
+                </a:solidFill>
+                <a:latin typeface="Verdana"/>
               </a:rPr>
               <a:t>F-D2-13   ·   Poster F-P08</a:t>
             </a:r>
@@ -6667,9 +6667,9 @@
             <a:r>
               <a:rPr sz="1000" b="0">
                 <a:solidFill>
-                  <a:srgbClr val="6B6255"/>
-                </a:solidFill>
-                <a:latin typeface="Arial"/>
+                  <a:srgbClr val="1B1A17"/>
+                </a:solidFill>
+                <a:latin typeface="Verdana"/>
               </a:rPr>
               <a:t>Grow Food, Grow Strong</a:t>
             </a:r>
@@ -6706,9 +6706,9 @@
             <a:r>
               <a:rPr sz="3800" b="1">
                 <a:solidFill>
-                  <a:srgbClr val="1F4D2B"/>
-                </a:solidFill>
-                <a:latin typeface="Georgia"/>
+                  <a:srgbClr val="1B1A17"/>
+                </a:solidFill>
+                <a:latin typeface="Rockwell"/>
               </a:rPr>
               <a:t>How many buckets?</a:t>
             </a:r>
@@ -6730,7 +6730,7 @@
             <a:avLst/>
           </a:prstGeom>
           <a:solidFill>
-            <a:srgbClr val="E2D8C4"/>
+            <a:srgbClr val="2F5D34"/>
           </a:solidFill>
           <a:ln>
             <a:noFill/>
@@ -6789,9 +6789,9 @@
             <a:r>
               <a:rPr sz="2800" b="0">
                 <a:solidFill>
-                  <a:srgbClr val="20190F"/>
-                </a:solidFill>
-                <a:latin typeface="Arial"/>
+                  <a:srgbClr val="1B1A17"/>
+                </a:solidFill>
+                <a:latin typeface="Verdana"/>
               </a:rPr>
               <a:t>•  10 m × 6 m = 60 m²</a:t>
             </a:r>
@@ -6805,9 +6805,9 @@
             <a:r>
               <a:rPr sz="2800" b="0">
                 <a:solidFill>
-                  <a:srgbClr val="20190F"/>
-                </a:solidFill>
-                <a:latin typeface="Arial"/>
+                  <a:srgbClr val="1B1A17"/>
+                </a:solidFill>
+                <a:latin typeface="Verdana"/>
               </a:rPr>
               <a:t>•  60 × 20 mm × 0.8 = 960 litres</a:t>
             </a:r>
@@ -6821,9 +6821,9 @@
             <a:r>
               <a:rPr sz="2800" b="0">
                 <a:solidFill>
-                  <a:srgbClr val="20190F"/>
-                </a:solidFill>
-                <a:latin typeface="Arial"/>
+                  <a:srgbClr val="1B1A17"/>
+                </a:solidFill>
+                <a:latin typeface="Verdana"/>
               </a:rPr>
               <a:t>•  ≈ 48 buckets from one storm</a:t>
             </a:r>
@@ -6845,11 +6845,11 @@
             <a:avLst/>
           </a:prstGeom>
           <a:solidFill>
-            <a:srgbClr val="FBF6EC"/>
+            <a:srgbClr val="EFE6D2"/>
           </a:solidFill>
           <a:ln w="15875">
             <a:solidFill>
-              <a:srgbClr val="E2D8C4"/>
+              <a:srgbClr val="2F5D34"/>
             </a:solidFill>
           </a:ln>
           <a:effectLst/>
@@ -6906,9 +6906,9 @@
             <a:r>
               <a:rPr sz="1200" b="1">
                 <a:solidFill>
-                  <a:srgbClr val="C07A1E"/>
-                </a:solidFill>
-                <a:latin typeface="Arial"/>
+                  <a:srgbClr val="B24E2A"/>
+                </a:solidFill>
+                <a:latin typeface="Verdana"/>
               </a:rPr>
               <a:t>IMAGE · F-IMG-12 · coming</a:t>
             </a:r>
@@ -6945,9 +6945,9 @@
             <a:r>
               <a:rPr sz="1800" b="1">
                 <a:solidFill>
-                  <a:srgbClr val="1F4D2B"/>
-                </a:solidFill>
-                <a:latin typeface="Georgia"/>
+                  <a:srgbClr val="1B1A17"/>
+                </a:solidFill>
+                <a:latin typeface="Rockwell"/>
               </a:rPr>
               <a:t>Buckets from one storm</a:t>
             </a:r>
@@ -6984,9 +6984,9 @@
             <a:r>
               <a:rPr sz="1100" b="0">
                 <a:solidFill>
-                  <a:srgbClr val="20190F"/>
-                </a:solidFill>
-                <a:latin typeface="Arial"/>
+                  <a:srgbClr val="1B1A17"/>
+                </a:solidFill>
+                <a:latin typeface="Verdana"/>
               </a:rPr>
               <a:t>A small house roof with rain and, beside it, a long neat line of identical 20 L buckets receding into the distance — many buckets.</a:t>
             </a:r>
@@ -7007,7 +7007,7 @@
     <p:bg>
       <p:bgPr>
         <a:solidFill>
-          <a:srgbClr val="F7F2E9"/>
+          <a:srgbClr val="EFE6D2"/>
         </a:solidFill>
         <a:effectLst/>
       </p:bgPr>
@@ -7049,9 +7049,9 @@
             <a:r>
               <a:rPr sz="1000" b="0">
                 <a:solidFill>
-                  <a:srgbClr val="6B6255"/>
-                </a:solidFill>
-                <a:latin typeface="Arial"/>
+                  <a:srgbClr val="1B1A17"/>
+                </a:solidFill>
+                <a:latin typeface="Verdana"/>
               </a:rPr>
               <a:t>F-D2-14   ·   Poster F-P08</a:t>
             </a:r>
@@ -7088,9 +7088,9 @@
             <a:r>
               <a:rPr sz="1000" b="0">
                 <a:solidFill>
-                  <a:srgbClr val="6B6255"/>
-                </a:solidFill>
-                <a:latin typeface="Arial"/>
+                  <a:srgbClr val="1B1A17"/>
+                </a:solidFill>
+                <a:latin typeface="Verdana"/>
               </a:rPr>
               <a:t>Grow Food, Grow Strong</a:t>
             </a:r>
@@ -7127,9 +7127,9 @@
             <a:r>
               <a:rPr sz="3800" b="1">
                 <a:solidFill>
-                  <a:srgbClr val="1F4D2B"/>
-                </a:solidFill>
-                <a:latin typeface="Georgia"/>
+                  <a:srgbClr val="1B1A17"/>
+                </a:solidFill>
+                <a:latin typeface="Rockwell"/>
               </a:rPr>
               <a:t>Gutter, first-flush, tank</a:t>
             </a:r>
@@ -7151,7 +7151,7 @@
             <a:avLst/>
           </a:prstGeom>
           <a:solidFill>
-            <a:srgbClr val="E2D8C4"/>
+            <a:srgbClr val="2F5D34"/>
           </a:solidFill>
           <a:ln>
             <a:noFill/>
@@ -7210,9 +7210,9 @@
             <a:r>
               <a:rPr sz="2400" b="0">
                 <a:solidFill>
-                  <a:srgbClr val="20190F"/>
-                </a:solidFill>
-                <a:latin typeface="Arial"/>
+                  <a:srgbClr val="1B1A17"/>
+                </a:solidFill>
+                <a:latin typeface="Verdana"/>
               </a:rPr>
               <a:t>•  First rain washes the roof — let it go</a:t>
             </a:r>
@@ -7226,9 +7226,9 @@
             <a:r>
               <a:rPr sz="2400" b="0">
                 <a:solidFill>
-                  <a:srgbClr val="20190F"/>
-                </a:solidFill>
-                <a:latin typeface="Arial"/>
+                  <a:srgbClr val="1B1A17"/>
+                </a:solidFill>
+                <a:latin typeface="Verdana"/>
               </a:rPr>
               <a:t>•  Lid on · tap above a bucket</a:t>
             </a:r>
@@ -7242,9 +7242,9 @@
             <a:r>
               <a:rPr sz="2400" b="0">
                 <a:solidFill>
-                  <a:srgbClr val="20190F"/>
-                </a:solidFill>
-                <a:latin typeface="Arial"/>
+                  <a:srgbClr val="1B1A17"/>
+                </a:solidFill>
+                <a:latin typeface="Verdana"/>
               </a:rPr>
               <a:t>•  Overflow to the garden</a:t>
             </a:r>
@@ -7290,7 +7290,7 @@
             <a:avLst/>
           </a:prstGeom>
           <a:solidFill>
-            <a:srgbClr val="20190F"/>
+            <a:srgbClr val="1B1A17"/>
           </a:solidFill>
           <a:ln>
             <a:noFill/>
@@ -7349,9 +7349,9 @@
             <a:r>
               <a:rPr sz="1100" b="0">
                 <a:solidFill>
-                  <a:srgbClr val="F7F2E9"/>
-                </a:solidFill>
-                <a:latin typeface="Arial"/>
+                  <a:srgbClr val="EFE6D2"/>
+                </a:solidFill>
+                <a:latin typeface="Verdana"/>
               </a:rPr>
               <a:t>▶  Clip F-ANI-10 · play from the tablet: watch-16-first-flush-tank.mp4</a:t>
             </a:r>
@@ -7372,7 +7372,7 @@
     <p:bg>
       <p:bgPr>
         <a:solidFill>
-          <a:srgbClr val="1F4D2B"/>
+          <a:srgbClr val="2F5D34"/>
         </a:solidFill>
         <a:effectLst/>
       </p:bgPr>
@@ -7414,9 +7414,9 @@
             <a:r>
               <a:rPr sz="1000" b="0">
                 <a:solidFill>
-                  <a:srgbClr val="A8D88A"/>
-                </a:solidFill>
-                <a:latin typeface="Arial"/>
+                  <a:srgbClr val="EFE6D2"/>
+                </a:solidFill>
+                <a:latin typeface="Verdana"/>
               </a:rPr>
               <a:t>F-D2-15</a:t>
             </a:r>
@@ -7453,9 +7453,9 @@
             <a:r>
               <a:rPr sz="1000" b="0">
                 <a:solidFill>
-                  <a:srgbClr val="A8D88A"/>
-                </a:solidFill>
-                <a:latin typeface="Arial"/>
+                  <a:srgbClr val="EFE6D2"/>
+                </a:solidFill>
+                <a:latin typeface="Verdana"/>
               </a:rPr>
               <a:t>Grow Food, Grow Strong</a:t>
             </a:r>
@@ -7492,9 +7492,9 @@
             <a:r>
               <a:rPr sz="4800" b="1">
                 <a:solidFill>
-                  <a:srgbClr val="F7F2E9"/>
-                </a:solidFill>
-                <a:latin typeface="Georgia"/>
+                  <a:srgbClr val="EFE6D2"/>
+                </a:solidFill>
+                <a:latin typeface="Rockwell"/>
               </a:rPr>
               <a:t>Every drop twice</a:t>
             </a:r>
@@ -7516,7 +7516,7 @@
             <a:avLst/>
           </a:prstGeom>
           <a:solidFill>
-            <a:srgbClr val="C07A1E"/>
+            <a:srgbClr val="B24E2A"/>
           </a:solidFill>
           <a:ln>
             <a:noFill/>
@@ -7575,9 +7575,9 @@
             <a:r>
               <a:rPr sz="2400" b="0">
                 <a:solidFill>
-                  <a:srgbClr val="A8D88A"/>
-                </a:solidFill>
-                <a:latin typeface="Arial"/>
+                  <a:srgbClr val="EFE6D2"/>
+                </a:solidFill>
+                <a:latin typeface="Verdana"/>
               </a:rPr>
               <a:t>Four stations · 10 minutes each</a:t>
             </a:r>
@@ -7599,11 +7599,11 @@
             <a:avLst/>
           </a:prstGeom>
           <a:solidFill>
-            <a:srgbClr val="FBF6EC"/>
+            <a:srgbClr val="EFE6D2"/>
           </a:solidFill>
           <a:ln w="15875">
             <a:solidFill>
-              <a:srgbClr val="E2D8C4"/>
+              <a:srgbClr val="2F5D34"/>
             </a:solidFill>
           </a:ln>
           <a:effectLst/>
@@ -7660,9 +7660,9 @@
             <a:r>
               <a:rPr sz="1200" b="1">
                 <a:solidFill>
-                  <a:srgbClr val="C07A1E"/>
-                </a:solidFill>
-                <a:latin typeface="Arial"/>
+                  <a:srgbClr val="B24E2A"/>
+                </a:solidFill>
+                <a:latin typeface="Verdana"/>
               </a:rPr>
               <a:t>POSTER ART · F-P07-ART · coming</a:t>
             </a:r>
@@ -7699,9 +7699,9 @@
             <a:r>
               <a:rPr sz="1800" b="1">
                 <a:solidFill>
-                  <a:srgbClr val="1F4D2B"/>
-                </a:solidFill>
-                <a:latin typeface="Georgia"/>
+                  <a:srgbClr val="1B1A17"/>
+                </a:solidFill>
+                <a:latin typeface="Rockwell"/>
               </a:rPr>
               <a:t>Artwork for F-P07 · Slow · Spread · Sink · Store</a:t>
             </a:r>
@@ -7738,9 +7738,9 @@
             <a:r>
               <a:rPr sz="1100" b="0">
                 <a:solidFill>
-                  <a:srgbClr val="20190F"/>
-                </a:solidFill>
-                <a:latin typeface="Arial"/>
+                  <a:srgbClr val="1B1A17"/>
+                </a:solidFill>
+                <a:latin typeface="Verdana"/>
               </a:rPr>
               <a:t>A homestead cross-section on a slope, left (top of slope) to right (bottom). Rain falls on a corrugated-iron roof → gutter → a first-flush pipe → a round covered tank with a tap and an overflow pipe → the overflow leads into a swale with a mound planted with small trees → below it mulched vegetable beds with a buried 2 ℓ bottle beside a plant → a washing…</a:t>
             </a:r>
@@ -7761,7 +7761,7 @@
     <p:bg>
       <p:bgPr>
         <a:solidFill>
-          <a:srgbClr val="F7F2E9"/>
+          <a:srgbClr val="EFE6D2"/>
         </a:solidFill>
         <a:effectLst/>
       </p:bgPr>
@@ -7803,9 +7803,9 @@
             <a:r>
               <a:rPr sz="1000" b="0">
                 <a:solidFill>
-                  <a:srgbClr val="6B6255"/>
-                </a:solidFill>
-                <a:latin typeface="Arial"/>
+                  <a:srgbClr val="1B1A17"/>
+                </a:solidFill>
+                <a:latin typeface="Verdana"/>
               </a:rPr>
               <a:t>F-D2-16</a:t>
             </a:r>
@@ -7842,9 +7842,9 @@
             <a:r>
               <a:rPr sz="1000" b="0">
                 <a:solidFill>
-                  <a:srgbClr val="6B6255"/>
-                </a:solidFill>
-                <a:latin typeface="Arial"/>
+                  <a:srgbClr val="1B1A17"/>
+                </a:solidFill>
+                <a:latin typeface="Verdana"/>
               </a:rPr>
               <a:t>Grow Food, Grow Strong</a:t>
             </a:r>
@@ -7866,7 +7866,7 @@
             <a:avLst/>
           </a:prstGeom>
           <a:solidFill>
-            <a:srgbClr val="C07A1E"/>
+            <a:srgbClr val="B24E2A"/>
           </a:solidFill>
           <a:ln>
             <a:noFill/>
@@ -7925,9 +7925,9 @@
             <a:r>
               <a:rPr sz="1400" b="1">
                 <a:solidFill>
-                  <a:srgbClr val="F7F2E9"/>
-                </a:solidFill>
-                <a:latin typeface="Arial"/>
+                  <a:srgbClr val="EFE6D2"/>
+                </a:solidFill>
+                <a:latin typeface="Verdana"/>
               </a:rPr>
               <a:t>YOUR TURN</a:t>
             </a:r>
@@ -7964,9 +7964,9 @@
             <a:r>
               <a:rPr sz="3800" b="1">
                 <a:solidFill>
-                  <a:srgbClr val="1F4D2B"/>
-                </a:solidFill>
-                <a:latin typeface="Georgia"/>
+                  <a:srgbClr val="1B1A17"/>
+                </a:solidFill>
+                <a:latin typeface="Rockwell"/>
               </a:rPr>
               <a:t>Bottle drip-waterer</a:t>
             </a:r>
@@ -7988,7 +7988,7 @@
             <a:avLst/>
           </a:prstGeom>
           <a:solidFill>
-            <a:srgbClr val="E2D8C4"/>
+            <a:srgbClr val="2F5D34"/>
           </a:solidFill>
           <a:ln>
             <a:noFill/>
@@ -8047,9 +8047,9 @@
             <a:r>
               <a:rPr sz="2600" b="1">
                 <a:solidFill>
-                  <a:srgbClr val="20190F"/>
-                </a:solidFill>
-                <a:latin typeface="Arial"/>
+                  <a:srgbClr val="1B1A17"/>
+                </a:solidFill>
+                <a:latin typeface="Verdana"/>
               </a:rPr>
               <a:t>•  Two small holes near the bottom</a:t>
             </a:r>
@@ -8063,9 +8063,9 @@
             <a:r>
               <a:rPr sz="2600" b="1">
                 <a:solidFill>
-                  <a:srgbClr val="20190F"/>
-                </a:solidFill>
-                <a:latin typeface="Arial"/>
+                  <a:srgbClr val="1B1A17"/>
+                </a:solidFill>
+                <a:latin typeface="Verdana"/>
               </a:rPr>
               <a:t>•  Bury to the neck beside the plant</a:t>
             </a:r>
@@ -8079,9 +8079,9 @@
             <a:r>
               <a:rPr sz="2600" b="1">
                 <a:solidFill>
-                  <a:srgbClr val="20190F"/>
-                </a:solidFill>
-                <a:latin typeface="Arial"/>
+                  <a:srgbClr val="1B1A17"/>
+                </a:solidFill>
+                <a:latin typeface="Verdana"/>
               </a:rPr>
               <a:t>•  Hot nail: pliers only</a:t>
             </a:r>
@@ -8103,11 +8103,11 @@
             <a:avLst/>
           </a:prstGeom>
           <a:solidFill>
-            <a:srgbClr val="FBF6EC"/>
+            <a:srgbClr val="EFE6D2"/>
           </a:solidFill>
           <a:ln w="15875">
             <a:solidFill>
-              <a:srgbClr val="E2D8C4"/>
+              <a:srgbClr val="2F5D34"/>
             </a:solidFill>
           </a:ln>
           <a:effectLst/>
@@ -8164,9 +8164,9 @@
             <a:r>
               <a:rPr sz="1200" b="1">
                 <a:solidFill>
-                  <a:srgbClr val="C07A1E"/>
-                </a:solidFill>
-                <a:latin typeface="Arial"/>
+                  <a:srgbClr val="B24E2A"/>
+                </a:solidFill>
+                <a:latin typeface="Verdana"/>
               </a:rPr>
               <a:t>IMAGE · F-IMG-13 · coming</a:t>
             </a:r>
@@ -8203,9 +8203,9 @@
             <a:r>
               <a:rPr sz="1800" b="1">
                 <a:solidFill>
-                  <a:srgbClr val="1F4D2B"/>
-                </a:solidFill>
-                <a:latin typeface="Georgia"/>
+                  <a:srgbClr val="1B1A17"/>
+                </a:solidFill>
+                <a:latin typeface="Rockwell"/>
               </a:rPr>
               <a:t>Bottle drip-waterer</a:t>
             </a:r>
@@ -8242,9 +8242,9 @@
             <a:r>
               <a:rPr sz="1100" b="0">
                 <a:solidFill>
-                  <a:srgbClr val="20190F"/>
-                </a:solidFill>
-                <a:latin typeface="Arial"/>
+                  <a:srgbClr val="1B1A17"/>
+                </a:solidFill>
+                <a:latin typeface="Verdana"/>
               </a:rPr>
               <a:t>Cut-away of soil with a 2 L bottle buried to its neck beside a young plant; tiny droplets leaving two small holes near the base towards the roots.</a:t>
             </a:r>
@@ -8265,7 +8265,7 @@
     <p:bg>
       <p:bgPr>
         <a:solidFill>
-          <a:srgbClr val="F7F2E9"/>
+          <a:srgbClr val="EFE6D2"/>
         </a:solidFill>
         <a:effectLst/>
       </p:bgPr>
@@ -8307,9 +8307,9 @@
             <a:r>
               <a:rPr sz="1000" b="0">
                 <a:solidFill>
-                  <a:srgbClr val="6B6255"/>
-                </a:solidFill>
-                <a:latin typeface="Arial"/>
+                  <a:srgbClr val="1B1A17"/>
+                </a:solidFill>
+                <a:latin typeface="Verdana"/>
               </a:rPr>
               <a:t>F-D2-17</a:t>
             </a:r>
@@ -8346,9 +8346,9 @@
             <a:r>
               <a:rPr sz="1000" b="0">
                 <a:solidFill>
-                  <a:srgbClr val="6B6255"/>
-                </a:solidFill>
-                <a:latin typeface="Arial"/>
+                  <a:srgbClr val="1B1A17"/>
+                </a:solidFill>
+                <a:latin typeface="Verdana"/>
               </a:rPr>
               <a:t>Grow Food, Grow Strong</a:t>
             </a:r>
@@ -8385,9 +8385,9 @@
             <a:r>
               <a:rPr sz="3800" b="1">
                 <a:solidFill>
-                  <a:srgbClr val="1F4D2B"/>
-                </a:solidFill>
-                <a:latin typeface="Georgia"/>
+                  <a:srgbClr val="1B1A17"/>
+                </a:solidFill>
+                <a:latin typeface="Rockwell"/>
               </a:rPr>
               <a:t>Mulch right</a:t>
             </a:r>
@@ -8409,7 +8409,7 @@
             <a:avLst/>
           </a:prstGeom>
           <a:solidFill>
-            <a:srgbClr val="E2D8C4"/>
+            <a:srgbClr val="2F5D34"/>
           </a:solidFill>
           <a:ln>
             <a:noFill/>
@@ -8468,9 +8468,9 @@
             <a:r>
               <a:rPr sz="2800" b="0">
                 <a:solidFill>
-                  <a:srgbClr val="20190F"/>
-                </a:solidFill>
-                <a:latin typeface="Arial"/>
+                  <a:srgbClr val="1B1A17"/>
+                </a:solidFill>
+                <a:latin typeface="Verdana"/>
               </a:rPr>
               <a:t>•  A hand's width deep</a:t>
             </a:r>
@@ -8484,9 +8484,9 @@
             <a:r>
               <a:rPr sz="2800" b="0">
                 <a:solidFill>
-                  <a:srgbClr val="20190F"/>
-                </a:solidFill>
-                <a:latin typeface="Arial"/>
+                  <a:srgbClr val="1B1A17"/>
+                </a:solidFill>
+                <a:latin typeface="Verdana"/>
               </a:rPr>
               <a:t>•  A fist's gap around stems</a:t>
             </a:r>
@@ -8500,9 +8500,9 @@
             <a:r>
               <a:rPr sz="2800" b="0">
                 <a:solidFill>
-                  <a:srgbClr val="20190F"/>
-                </a:solidFill>
-                <a:latin typeface="Arial"/>
+                  <a:srgbClr val="1B1A17"/>
+                </a:solidFill>
+                <a:latin typeface="Verdana"/>
               </a:rPr>
               <a:t>•  Halves the watering</a:t>
             </a:r>
@@ -8548,7 +8548,7 @@
             <a:avLst/>
           </a:prstGeom>
           <a:solidFill>
-            <a:srgbClr val="20190F"/>
+            <a:srgbClr val="1B1A17"/>
           </a:solidFill>
           <a:ln>
             <a:noFill/>
@@ -8607,9 +8607,9 @@
             <a:r>
               <a:rPr sz="1100" b="0">
                 <a:solidFill>
-                  <a:srgbClr val="F7F2E9"/>
-                </a:solidFill>
-                <a:latin typeface="Arial"/>
+                  <a:srgbClr val="EFE6D2"/>
+                </a:solidFill>
+                <a:latin typeface="Verdana"/>
               </a:rPr>
               <a:t>▶  Clip F-ANI-12 · play from the tablet: watch-14-mulch-protection.mp4</a:t>
             </a:r>
@@ -8630,7 +8630,7 @@
     <p:bg>
       <p:bgPr>
         <a:solidFill>
-          <a:srgbClr val="F7F2E9"/>
+          <a:srgbClr val="EFE6D2"/>
         </a:solidFill>
         <a:effectLst/>
       </p:bgPr>
@@ -8672,9 +8672,9 @@
             <a:r>
               <a:rPr sz="1000" b="0">
                 <a:solidFill>
-                  <a:srgbClr val="6B6255"/>
-                </a:solidFill>
-                <a:latin typeface="Arial"/>
+                  <a:srgbClr val="1B1A17"/>
+                </a:solidFill>
+                <a:latin typeface="Verdana"/>
               </a:rPr>
               <a:t>F-D2-18   ·   Poster F-P07</a:t>
             </a:r>
@@ -8711,9 +8711,9 @@
             <a:r>
               <a:rPr sz="1000" b="0">
                 <a:solidFill>
-                  <a:srgbClr val="6B6255"/>
-                </a:solidFill>
-                <a:latin typeface="Arial"/>
+                  <a:srgbClr val="1B1A17"/>
+                </a:solidFill>
+                <a:latin typeface="Verdana"/>
               </a:rPr>
               <a:t>Grow Food, Grow Strong</a:t>
             </a:r>
@@ -8750,9 +8750,9 @@
             <a:r>
               <a:rPr sz="3800" b="1">
                 <a:solidFill>
-                  <a:srgbClr val="1F4D2B"/>
-                </a:solidFill>
-                <a:latin typeface="Georgia"/>
+                  <a:srgbClr val="1B1A17"/>
+                </a:solidFill>
+                <a:latin typeface="Rockwell"/>
               </a:rPr>
               <a:t>Greywater and the banana circle</a:t>
             </a:r>
@@ -8774,7 +8774,7 @@
             <a:avLst/>
           </a:prstGeom>
           <a:solidFill>
-            <a:srgbClr val="E2D8C4"/>
+            <a:srgbClr val="2F5D34"/>
           </a:solidFill>
           <a:ln>
             <a:noFill/>
@@ -8833,9 +8833,9 @@
             <a:r>
               <a:rPr sz="2400" b="0">
                 <a:solidFill>
-                  <a:srgbClr val="20190F"/>
-                </a:solidFill>
-                <a:latin typeface="Arial"/>
+                  <a:srgbClr val="1B1A17"/>
+                </a:solidFill>
+                <a:latin typeface="Verdana"/>
               </a:rPr>
               <a:t>•  Washing water to trees, not leaves you eat raw</a:t>
             </a:r>
@@ -8849,9 +8849,9 @@
             <a:r>
               <a:rPr sz="2400" b="0">
                 <a:solidFill>
-                  <a:srgbClr val="20190F"/>
-                </a:solidFill>
-                <a:latin typeface="Arial"/>
+                  <a:srgbClr val="1B1A17"/>
+                </a:solidFill>
+                <a:latin typeface="Verdana"/>
               </a:rPr>
               <a:t>•  Never toilet, nappy, bleach or oil water</a:t>
             </a:r>
@@ -8865,9 +8865,9 @@
             <a:r>
               <a:rPr sz="2400" b="0">
                 <a:solidFill>
-                  <a:srgbClr val="20190F"/>
-                </a:solidFill>
-                <a:latin typeface="Arial"/>
+                  <a:srgbClr val="1B1A17"/>
+                </a:solidFill>
+                <a:latin typeface="Verdana"/>
               </a:rPr>
               <a:t>•  Change where you pour</a:t>
             </a:r>
@@ -8913,7 +8913,7 @@
             <a:avLst/>
           </a:prstGeom>
           <a:solidFill>
-            <a:srgbClr val="20190F"/>
+            <a:srgbClr val="1B1A17"/>
           </a:solidFill>
           <a:ln>
             <a:noFill/>
@@ -8972,9 +8972,9 @@
             <a:r>
               <a:rPr sz="1100" b="0">
                 <a:solidFill>
-                  <a:srgbClr val="F7F2E9"/>
-                </a:solidFill>
-                <a:latin typeface="Arial"/>
+                  <a:srgbClr val="EFE6D2"/>
+                </a:solidFill>
+                <a:latin typeface="Verdana"/>
               </a:rPr>
               <a:t>▶  Clip F-ANI-11 · play from the tablet: watch-21-greywater-mulch.mp4</a:t>
             </a:r>
@@ -8995,7 +8995,7 @@
     <p:bg>
       <p:bgPr>
         <a:solidFill>
-          <a:srgbClr val="F7F2E9"/>
+          <a:srgbClr val="EFE6D2"/>
         </a:solidFill>
         <a:effectLst/>
       </p:bgPr>
@@ -9037,9 +9037,9 @@
             <a:r>
               <a:rPr sz="1000" b="0">
                 <a:solidFill>
-                  <a:srgbClr val="6B6255"/>
-                </a:solidFill>
-                <a:latin typeface="Arial"/>
+                  <a:srgbClr val="1B1A17"/>
+                </a:solidFill>
+                <a:latin typeface="Verdana"/>
               </a:rPr>
               <a:t>F-D2-19</a:t>
             </a:r>
@@ -9076,9 +9076,9 @@
             <a:r>
               <a:rPr sz="1000" b="0">
                 <a:solidFill>
-                  <a:srgbClr val="6B6255"/>
-                </a:solidFill>
-                <a:latin typeface="Arial"/>
+                  <a:srgbClr val="1B1A17"/>
+                </a:solidFill>
+                <a:latin typeface="Verdana"/>
               </a:rPr>
               <a:t>Grow Food, Grow Strong</a:t>
             </a:r>
@@ -9115,9 +9115,9 @@
             <a:r>
               <a:rPr sz="3800" b="1">
                 <a:solidFill>
-                  <a:srgbClr val="1F4D2B"/>
-                </a:solidFill>
-                <a:latin typeface="Georgia"/>
+                  <a:srgbClr val="1B1A17"/>
+                </a:solidFill>
+                <a:latin typeface="Rockwell"/>
               </a:rPr>
               <a:t>Tonight</a:t>
             </a:r>
@@ -9139,7 +9139,7 @@
             <a:avLst/>
           </a:prstGeom>
           <a:solidFill>
-            <a:srgbClr val="E2D8C4"/>
+            <a:srgbClr val="2F5D34"/>
           </a:solidFill>
           <a:ln>
             <a:noFill/>
@@ -9198,9 +9198,9 @@
             <a:r>
               <a:rPr sz="2400" b="0">
                 <a:solidFill>
-                  <a:srgbClr val="20190F"/>
-                </a:solidFill>
-                <a:latin typeface="Arial"/>
+                  <a:srgbClr val="1B1A17"/>
+                </a:solidFill>
+                <a:latin typeface="Verdana"/>
               </a:rPr>
               <a:t>•  One bucket of washing water on a plant</a:t>
             </a:r>
@@ -9214,9 +9214,9 @@
             <a:r>
               <a:rPr sz="2400" b="0">
                 <a:solidFill>
-                  <a:srgbClr val="20190F"/>
-                </a:solidFill>
-                <a:latin typeface="Arial"/>
+                  <a:srgbClr val="1B1A17"/>
+                </a:solidFill>
+                <a:latin typeface="Verdana"/>
               </a:rPr>
               <a:t>•  Bring grass, leaves, greens, manure tomorrow</a:t>
             </a:r>
@@ -9238,11 +9238,11 @@
             <a:avLst/>
           </a:prstGeom>
           <a:solidFill>
-            <a:srgbClr val="FBF6EC"/>
+            <a:srgbClr val="EFE6D2"/>
           </a:solidFill>
           <a:ln w="15875">
             <a:solidFill>
-              <a:srgbClr val="E2D8C4"/>
+              <a:srgbClr val="2F5D34"/>
             </a:solidFill>
           </a:ln>
           <a:effectLst/>
@@ -9299,9 +9299,9 @@
             <a:r>
               <a:rPr sz="1200" b="1">
                 <a:solidFill>
-                  <a:srgbClr val="C07A1E"/>
-                </a:solidFill>
-                <a:latin typeface="Arial"/>
+                  <a:srgbClr val="B24E2A"/>
+                </a:solidFill>
+                <a:latin typeface="Verdana"/>
               </a:rPr>
               <a:t>IMAGE · F-IMG-05 · coming</a:t>
             </a:r>
@@ -9338,9 +9338,9 @@
             <a:r>
               <a:rPr sz="1800" b="1">
                 <a:solidFill>
-                  <a:srgbClr val="1F4D2B"/>
-                </a:solidFill>
-                <a:latin typeface="Georgia"/>
+                  <a:srgbClr val="1B1A17"/>
+                </a:solidFill>
+                <a:latin typeface="Rockwell"/>
               </a:rPr>
               <a:t>Closing circle</a:t>
             </a:r>
@@ -9377,9 +9377,9 @@
             <a:r>
               <a:rPr sz="1100" b="0">
                 <a:solidFill>
-                  <a:srgbClr val="20190F"/>
-                </a:solidFill>
-                <a:latin typeface="Arial"/>
+                  <a:srgbClr val="1B1A17"/>
+                </a:solidFill>
+                <a:latin typeface="Verdana"/>
               </a:rPr>
               <a:t>Late-afternoon warm light; a circle of standing people, one holding up a hand to speak; tools laid neatly on a tarp in the centre.</a:t>
             </a:r>
@@ -9400,7 +9400,7 @@
     <p:bg>
       <p:bgPr>
         <a:solidFill>
-          <a:srgbClr val="F7F2E9"/>
+          <a:srgbClr val="EFE6D2"/>
         </a:solidFill>
         <a:effectLst/>
       </p:bgPr>
@@ -9442,9 +9442,9 @@
             <a:r>
               <a:rPr sz="1000" b="0">
                 <a:solidFill>
-                  <a:srgbClr val="6B6255"/>
-                </a:solidFill>
-                <a:latin typeface="Arial"/>
+                  <a:srgbClr val="1B1A17"/>
+                </a:solidFill>
+                <a:latin typeface="Verdana"/>
               </a:rPr>
               <a:t>F-D2-02   ·   Poster F-P07</a:t>
             </a:r>
@@ -9481,9 +9481,9 @@
             <a:r>
               <a:rPr sz="1000" b="0">
                 <a:solidFill>
-                  <a:srgbClr val="6B6255"/>
-                </a:solidFill>
-                <a:latin typeface="Arial"/>
+                  <a:srgbClr val="1B1A17"/>
+                </a:solidFill>
+                <a:latin typeface="Verdana"/>
               </a:rPr>
               <a:t>Grow Food, Grow Strong</a:t>
             </a:r>
@@ -9520,9 +9520,9 @@
             <a:r>
               <a:rPr sz="3800" b="1">
                 <a:solidFill>
-                  <a:srgbClr val="1F4D2B"/>
-                </a:solidFill>
-                <a:latin typeface="Georgia"/>
+                  <a:srgbClr val="1B1A17"/>
+                </a:solidFill>
+                <a:latin typeface="Rockwell"/>
               </a:rPr>
               <a:t>Where did the storm go?</a:t>
             </a:r>
@@ -9544,7 +9544,7 @@
             <a:avLst/>
           </a:prstGeom>
           <a:solidFill>
-            <a:srgbClr val="E2D8C4"/>
+            <a:srgbClr val="2F5D34"/>
           </a:solidFill>
           <a:ln>
             <a:noFill/>
@@ -9603,9 +9603,9 @@
             <a:r>
               <a:rPr sz="2800" b="0">
                 <a:solidFill>
-                  <a:srgbClr val="20190F"/>
-                </a:solidFill>
-                <a:latin typeface="Arial"/>
+                  <a:srgbClr val="1B1A17"/>
+                </a:solidFill>
+                <a:latin typeface="Verdana"/>
               </a:rPr>
               <a:t>•  Summer storms run away</a:t>
             </a:r>
@@ -9619,9 +9619,9 @@
             <a:r>
               <a:rPr sz="2800" b="0">
                 <a:solidFill>
-                  <a:srgbClr val="20190F"/>
-                </a:solidFill>
-                <a:latin typeface="Arial"/>
+                  <a:srgbClr val="1B1A17"/>
+                </a:solidFill>
+                <a:latin typeface="Verdana"/>
               </a:rPr>
               <a:t>•  They take our soil with them</a:t>
             </a:r>
@@ -9667,7 +9667,7 @@
             <a:avLst/>
           </a:prstGeom>
           <a:solidFill>
-            <a:srgbClr val="20190F"/>
+            <a:srgbClr val="1B1A17"/>
           </a:solidFill>
           <a:ln>
             <a:noFill/>
@@ -9726,9 +9726,9 @@
             <a:r>
               <a:rPr sz="1100" b="0">
                 <a:solidFill>
-                  <a:srgbClr val="F7F2E9"/>
-                </a:solidFill>
-                <a:latin typeface="Arial"/>
+                  <a:srgbClr val="EFE6D2"/>
+                </a:solidFill>
+                <a:latin typeface="Verdana"/>
               </a:rPr>
               <a:t>▶  Clip F-ANI-07 · play from the tablet: flow-roof-rain.mp4</a:t>
             </a:r>
@@ -9749,7 +9749,7 @@
     <p:bg>
       <p:bgPr>
         <a:solidFill>
-          <a:srgbClr val="F7F2E9"/>
+          <a:srgbClr val="EFE6D2"/>
         </a:solidFill>
         <a:effectLst/>
       </p:bgPr>
@@ -9791,9 +9791,9 @@
             <a:r>
               <a:rPr sz="1000" b="0">
                 <a:solidFill>
-                  <a:srgbClr val="6B6255"/>
-                </a:solidFill>
-                <a:latin typeface="Arial"/>
+                  <a:srgbClr val="1B1A17"/>
+                </a:solidFill>
+                <a:latin typeface="Verdana"/>
               </a:rPr>
               <a:t>F-D2-03</a:t>
             </a:r>
@@ -9830,9 +9830,9 @@
             <a:r>
               <a:rPr sz="1000" b="0">
                 <a:solidFill>
-                  <a:srgbClr val="6B6255"/>
-                </a:solidFill>
-                <a:latin typeface="Arial"/>
+                  <a:srgbClr val="1B1A17"/>
+                </a:solidFill>
+                <a:latin typeface="Verdana"/>
               </a:rPr>
               <a:t>Grow Food, Grow Strong</a:t>
             </a:r>
@@ -9854,7 +9854,7 @@
             <a:avLst/>
           </a:prstGeom>
           <a:solidFill>
-            <a:srgbClr val="C07A1E"/>
+            <a:srgbClr val="B24E2A"/>
           </a:solidFill>
           <a:ln>
             <a:noFill/>
@@ -9913,9 +9913,9 @@
             <a:r>
               <a:rPr sz="1400" b="1">
                 <a:solidFill>
-                  <a:srgbClr val="F7F2E9"/>
-                </a:solidFill>
-                <a:latin typeface="Arial"/>
+                  <a:srgbClr val="EFE6D2"/>
+                </a:solidFill>
+                <a:latin typeface="Verdana"/>
               </a:rPr>
               <a:t>YOUR TURN</a:t>
             </a:r>
@@ -9952,9 +9952,9 @@
             <a:r>
               <a:rPr sz="3800" b="1">
                 <a:solidFill>
-                  <a:srgbClr val="1F4D2B"/>
-                </a:solidFill>
-                <a:latin typeface="Georgia"/>
+                  <a:srgbClr val="1B1A17"/>
+                </a:solidFill>
+                <a:latin typeface="Rockwell"/>
               </a:rPr>
               <a:t>Fast water, slow water</a:t>
             </a:r>
@@ -9976,7 +9976,7 @@
             <a:avLst/>
           </a:prstGeom>
           <a:solidFill>
-            <a:srgbClr val="E2D8C4"/>
+            <a:srgbClr val="2F5D34"/>
           </a:solidFill>
           <a:ln>
             <a:noFill/>
@@ -10035,9 +10035,9 @@
             <a:r>
               <a:rPr sz="3000" b="1">
                 <a:solidFill>
-                  <a:srgbClr val="20190F"/>
-                </a:solidFill>
-                <a:latin typeface="Arial"/>
+                  <a:srgbClr val="1B1A17"/>
+                </a:solidFill>
+                <a:latin typeface="Verdana"/>
               </a:rPr>
               <a:t>•  Pour on bare soil</a:t>
             </a:r>
@@ -10051,9 +10051,9 @@
             <a:r>
               <a:rPr sz="3000" b="1">
                 <a:solidFill>
-                  <a:srgbClr val="20190F"/>
-                </a:solidFill>
-                <a:latin typeface="Arial"/>
+                  <a:srgbClr val="1B1A17"/>
+                </a:solidFill>
+                <a:latin typeface="Verdana"/>
               </a:rPr>
               <a:t>•  Add stones and grass</a:t>
             </a:r>
@@ -10067,9 +10067,9 @@
             <a:r>
               <a:rPr sz="3000" b="1">
                 <a:solidFill>
-                  <a:srgbClr val="20190F"/>
-                </a:solidFill>
-                <a:latin typeface="Arial"/>
+                  <a:srgbClr val="1B1A17"/>
+                </a:solidFill>
+                <a:latin typeface="Verdana"/>
               </a:rPr>
               <a:t>•  Pour again</a:t>
             </a:r>
@@ -10091,11 +10091,11 @@
             <a:avLst/>
           </a:prstGeom>
           <a:solidFill>
-            <a:srgbClr val="FBF6EC"/>
+            <a:srgbClr val="EFE6D2"/>
           </a:solidFill>
           <a:ln w="15875">
             <a:solidFill>
-              <a:srgbClr val="E2D8C4"/>
+              <a:srgbClr val="2F5D34"/>
             </a:solidFill>
           </a:ln>
           <a:effectLst/>
@@ -10152,9 +10152,9 @@
             <a:r>
               <a:rPr sz="1200" b="1">
                 <a:solidFill>
-                  <a:srgbClr val="C07A1E"/>
-                </a:solidFill>
-                <a:latin typeface="Arial"/>
+                  <a:srgbClr val="B24E2A"/>
+                </a:solidFill>
+                <a:latin typeface="Verdana"/>
               </a:rPr>
               <a:t>IMAGE · F-IMG-07 · coming</a:t>
             </a:r>
@@ -10191,9 +10191,9 @@
             <a:r>
               <a:rPr sz="1800" b="1">
                 <a:solidFill>
-                  <a:srgbClr val="1F4D2B"/>
-                </a:solidFill>
-                <a:latin typeface="Georgia"/>
+                  <a:srgbClr val="1B1A17"/>
+                </a:solidFill>
+                <a:latin typeface="Rockwell"/>
               </a:rPr>
               <a:t>Tray demo</a:t>
             </a:r>
@@ -10230,9 +10230,9 @@
             <a:r>
               <a:rPr sz="1100" b="0">
                 <a:solidFill>
-                  <a:srgbClr val="20190F"/>
-                </a:solidFill>
-                <a:latin typeface="Arial"/>
+                  <a:srgbClr val="1B1A17"/>
+                </a:solidFill>
+                <a:latin typeface="Verdana"/>
               </a:rPr>
               <a:t>Two shallow trays of soil tilted on bricks: one bare with water running off carrying soil into a basin; one with a line of stones and grass where water spreads and soaks. Hands pouring from 2 L bottles.</a:t>
             </a:r>
@@ -10253,7 +10253,7 @@
     <p:bg>
       <p:bgPr>
         <a:solidFill>
-          <a:srgbClr val="F7F2E9"/>
+          <a:srgbClr val="EFE6D2"/>
         </a:solidFill>
         <a:effectLst/>
       </p:bgPr>
@@ -10295,9 +10295,9 @@
             <a:r>
               <a:rPr sz="1000" b="0">
                 <a:solidFill>
-                  <a:srgbClr val="6B6255"/>
-                </a:solidFill>
-                <a:latin typeface="Arial"/>
+                  <a:srgbClr val="1B1A17"/>
+                </a:solidFill>
+                <a:latin typeface="Verdana"/>
               </a:rPr>
               <a:t>F-D2-04   ·   Poster F-P07</a:t>
             </a:r>
@@ -10334,9 +10334,9 @@
             <a:r>
               <a:rPr sz="1000" b="0">
                 <a:solidFill>
-                  <a:srgbClr val="6B6255"/>
-                </a:solidFill>
-                <a:latin typeface="Arial"/>
+                  <a:srgbClr val="1B1A17"/>
+                </a:solidFill>
+                <a:latin typeface="Verdana"/>
               </a:rPr>
               <a:t>Grow Food, Grow Strong</a:t>
             </a:r>
@@ -10373,9 +10373,9 @@
             <a:r>
               <a:rPr sz="3800" b="1">
                 <a:solidFill>
-                  <a:srgbClr val="1F4D2B"/>
-                </a:solidFill>
-                <a:latin typeface="Georgia"/>
+                  <a:srgbClr val="1B1A17"/>
+                </a:solidFill>
+                <a:latin typeface="Rockwell"/>
               </a:rPr>
               <a:t>Slow · Spread · Sink · Store</a:t>
             </a:r>
@@ -10397,7 +10397,7 @@
             <a:avLst/>
           </a:prstGeom>
           <a:solidFill>
-            <a:srgbClr val="E2D8C4"/>
+            <a:srgbClr val="2F5D34"/>
           </a:solidFill>
           <a:ln>
             <a:noFill/>
@@ -10456,9 +10456,9 @@
             <a:r>
               <a:rPr sz="2800" b="0">
                 <a:solidFill>
-                  <a:srgbClr val="20190F"/>
-                </a:solidFill>
-                <a:latin typeface="Arial"/>
+                  <a:srgbClr val="1B1A17"/>
+                </a:solidFill>
+                <a:latin typeface="Verdana"/>
               </a:rPr>
               <a:t>•  Slow it · spread it</a:t>
             </a:r>
@@ -10472,9 +10472,9 @@
             <a:r>
               <a:rPr sz="2800" b="0">
                 <a:solidFill>
-                  <a:srgbClr val="20190F"/>
-                </a:solidFill>
-                <a:latin typeface="Arial"/>
+                  <a:srgbClr val="1B1A17"/>
+                </a:solidFill>
+                <a:latin typeface="Verdana"/>
               </a:rPr>
               <a:t>•  Sink it · store it</a:t>
             </a:r>
@@ -10496,11 +10496,11 @@
             <a:avLst/>
           </a:prstGeom>
           <a:solidFill>
-            <a:srgbClr val="FBF6EC"/>
+            <a:srgbClr val="EFE6D2"/>
           </a:solidFill>
           <a:ln w="15875">
             <a:solidFill>
-              <a:srgbClr val="E2D8C4"/>
+              <a:srgbClr val="2F5D34"/>
             </a:solidFill>
           </a:ln>
           <a:effectLst/>
@@ -10557,9 +10557,9 @@
             <a:r>
               <a:rPr sz="1200" b="1">
                 <a:solidFill>
-                  <a:srgbClr val="C07A1E"/>
-                </a:solidFill>
-                <a:latin typeface="Arial"/>
+                  <a:srgbClr val="B24E2A"/>
+                </a:solidFill>
+                <a:latin typeface="Verdana"/>
               </a:rPr>
               <a:t>POSTER ART · F-P07-ART · coming</a:t>
             </a:r>
@@ -10596,9 +10596,9 @@
             <a:r>
               <a:rPr sz="1800" b="1">
                 <a:solidFill>
-                  <a:srgbClr val="1F4D2B"/>
-                </a:solidFill>
-                <a:latin typeface="Georgia"/>
+                  <a:srgbClr val="1B1A17"/>
+                </a:solidFill>
+                <a:latin typeface="Rockwell"/>
               </a:rPr>
               <a:t>Artwork for F-P07 · Slow · Spread · Sink · Store</a:t>
             </a:r>
@@ -10635,9 +10635,9 @@
             <a:r>
               <a:rPr sz="1100" b="0">
                 <a:solidFill>
-                  <a:srgbClr val="20190F"/>
-                </a:solidFill>
-                <a:latin typeface="Arial"/>
+                  <a:srgbClr val="1B1A17"/>
+                </a:solidFill>
+                <a:latin typeface="Verdana"/>
               </a:rPr>
               <a:t>A homestead cross-section on a slope, left (top of slope) to right (bottom). Rain falls on a corrugated-iron roof → gutter → a first-flush pipe → a round covered tank with a tap and an overflow pipe → the overflow leads into a swale with a mound planted with small trees → below it mulched vegetable beds with a buried 2 ℓ bottle beside a plant → a washing…</a:t>
             </a:r>
@@ -10658,7 +10658,7 @@
     <p:bg>
       <p:bgPr>
         <a:solidFill>
-          <a:srgbClr val="F7F2E9"/>
+          <a:srgbClr val="EFE6D2"/>
         </a:solidFill>
         <a:effectLst/>
       </p:bgPr>
@@ -10700,9 +10700,9 @@
             <a:r>
               <a:rPr sz="1000" b="0">
                 <a:solidFill>
-                  <a:srgbClr val="6B6255"/>
-                </a:solidFill>
-                <a:latin typeface="Arial"/>
+                  <a:srgbClr val="1B1A17"/>
+                </a:solidFill>
+                <a:latin typeface="Verdana"/>
               </a:rPr>
               <a:t>F-D2-05</a:t>
             </a:r>
@@ -10739,9 +10739,9 @@
             <a:r>
               <a:rPr sz="1000" b="0">
                 <a:solidFill>
-                  <a:srgbClr val="6B6255"/>
-                </a:solidFill>
-                <a:latin typeface="Arial"/>
+                  <a:srgbClr val="1B1A17"/>
+                </a:solidFill>
+                <a:latin typeface="Verdana"/>
               </a:rPr>
               <a:t>Grow Food, Grow Strong</a:t>
             </a:r>
@@ -10763,7 +10763,7 @@
             <a:avLst/>
           </a:prstGeom>
           <a:solidFill>
-            <a:srgbClr val="C07A1E"/>
+            <a:srgbClr val="B24E2A"/>
           </a:solidFill>
           <a:ln>
             <a:noFill/>
@@ -10822,9 +10822,9 @@
             <a:r>
               <a:rPr sz="1400" b="1">
                 <a:solidFill>
-                  <a:srgbClr val="F7F2E9"/>
-                </a:solidFill>
-                <a:latin typeface="Arial"/>
+                  <a:srgbClr val="EFE6D2"/>
+                </a:solidFill>
+                <a:latin typeface="Verdana"/>
               </a:rPr>
               <a:t>YOUR TURN</a:t>
             </a:r>
@@ -10861,9 +10861,9 @@
             <a:r>
               <a:rPr sz="3800" b="1">
                 <a:solidFill>
-                  <a:srgbClr val="1F4D2B"/>
-                </a:solidFill>
-                <a:latin typeface="Georgia"/>
+                  <a:srgbClr val="1B1A17"/>
+                </a:solidFill>
+                <a:latin typeface="Rockwell"/>
               </a:rPr>
               <a:t>Two catches on your map</a:t>
             </a:r>
@@ -10885,7 +10885,7 @@
             <a:avLst/>
           </a:prstGeom>
           <a:solidFill>
-            <a:srgbClr val="E2D8C4"/>
+            <a:srgbClr val="2F5D34"/>
           </a:solidFill>
           <a:ln>
             <a:noFill/>
@@ -10944,9 +10944,9 @@
             <a:r>
               <a:rPr sz="2600" b="1">
                 <a:solidFill>
-                  <a:srgbClr val="20190F"/>
-                </a:solidFill>
-                <a:latin typeface="Arial"/>
+                  <a:srgbClr val="1B1A17"/>
+                </a:solidFill>
+                <a:latin typeface="Verdana"/>
               </a:rPr>
               <a:t>•  Blue arrows: where water comes from</a:t>
             </a:r>
@@ -10960,9 +10960,9 @@
             <a:r>
               <a:rPr sz="2600" b="1">
                 <a:solidFill>
-                  <a:srgbClr val="20190F"/>
-                </a:solidFill>
-                <a:latin typeface="Arial"/>
+                  <a:srgbClr val="1B1A17"/>
+                </a:solidFill>
+                <a:latin typeface="Verdana"/>
               </a:rPr>
               <a:t>•  Two places to catch it</a:t>
             </a:r>
@@ -10984,11 +10984,11 @@
             <a:avLst/>
           </a:prstGeom>
           <a:solidFill>
-            <a:srgbClr val="FBF6EC"/>
+            <a:srgbClr val="EFE6D2"/>
           </a:solidFill>
           <a:ln w="15875">
             <a:solidFill>
-              <a:srgbClr val="E2D8C4"/>
+              <a:srgbClr val="2F5D34"/>
             </a:solidFill>
           </a:ln>
           <a:effectLst/>
@@ -11045,9 +11045,9 @@
             <a:r>
               <a:rPr sz="1200" b="1">
                 <a:solidFill>
-                  <a:srgbClr val="C07A1E"/>
-                </a:solidFill>
-                <a:latin typeface="Arial"/>
+                  <a:srgbClr val="B24E2A"/>
+                </a:solidFill>
+                <a:latin typeface="Verdana"/>
               </a:rPr>
               <a:t>IMAGE · F-IMG-04 · coming</a:t>
             </a:r>
@@ -11084,9 +11084,9 @@
             <a:r>
               <a:rPr sz="1800" b="1">
                 <a:solidFill>
-                  <a:srgbClr val="1F4D2B"/>
-                </a:solidFill>
-                <a:latin typeface="Georgia"/>
+                  <a:srgbClr val="1B1A17"/>
+                </a:solidFill>
+                <a:latin typeface="Rockwell"/>
               </a:rPr>
               <a:t>My garden map</a:t>
             </a:r>
@@ -11123,9 +11123,9 @@
             <a:r>
               <a:rPr sz="1100" b="0">
                 <a:solidFill>
-                  <a:srgbClr val="20190F"/>
-                </a:solidFill>
-                <a:latin typeface="Arial"/>
+                  <a:srgbClr val="1B1A17"/>
+                </a:solidFill>
+                <a:latin typeface="Verdana"/>
               </a:rPr>
               <a:t>A hand-drawn map on paper seen from above: a house square, a north arrow, a tap, blue arrows of water, a sun symbol on the north side, a circle marking zone 1. Pencil and crayon style.</a:t>
             </a:r>
@@ -11146,7 +11146,7 @@
     <p:bg>
       <p:bgPr>
         <a:solidFill>
-          <a:srgbClr val="F7F2E9"/>
+          <a:srgbClr val="EFE6D2"/>
         </a:solidFill>
         <a:effectLst/>
       </p:bgPr>
@@ -11188,9 +11188,9 @@
             <a:r>
               <a:rPr sz="1000" b="0">
                 <a:solidFill>
-                  <a:srgbClr val="6B6255"/>
-                </a:solidFill>
-                <a:latin typeface="Arial"/>
+                  <a:srgbClr val="1B1A17"/>
+                </a:solidFill>
+                <a:latin typeface="Verdana"/>
               </a:rPr>
               <a:t>F-D2-06</a:t>
             </a:r>
@@ -11227,9 +11227,9 @@
             <a:r>
               <a:rPr sz="1000" b="0">
                 <a:solidFill>
-                  <a:srgbClr val="6B6255"/>
-                </a:solidFill>
-                <a:latin typeface="Arial"/>
+                  <a:srgbClr val="1B1A17"/>
+                </a:solidFill>
+                <a:latin typeface="Verdana"/>
               </a:rPr>
               <a:t>Grow Food, Grow Strong</a:t>
             </a:r>
@@ -11266,9 +11266,9 @@
             <a:r>
               <a:rPr sz="3800" b="1">
                 <a:solidFill>
-                  <a:srgbClr val="1F4D2B"/>
-                </a:solidFill>
-                <a:latin typeface="Georgia"/>
+                  <a:srgbClr val="1B1A17"/>
+                </a:solidFill>
+                <a:latin typeface="Rockwell"/>
               </a:rPr>
               <a:t>Safety first</a:t>
             </a:r>
@@ -11290,7 +11290,7 @@
             <a:avLst/>
           </a:prstGeom>
           <a:solidFill>
-            <a:srgbClr val="E2D8C4"/>
+            <a:srgbClr val="2F5D34"/>
           </a:solidFill>
           <a:ln>
             <a:noFill/>
@@ -11349,9 +11349,9 @@
             <a:r>
               <a:rPr sz="2400" b="0">
                 <a:solidFill>
-                  <a:srgbClr val="20190F"/>
-                </a:solidFill>
-                <a:latin typeface="Arial"/>
+                  <a:srgbClr val="1B1A17"/>
+                </a:solidFill>
+                <a:latin typeface="Verdana"/>
               </a:rPr>
               <a:t>•  Tools point down</a:t>
             </a:r>
@@ -11365,9 +11365,9 @@
             <a:r>
               <a:rPr sz="2400" b="0">
                 <a:solidFill>
-                  <a:srgbClr val="20190F"/>
-                </a:solidFill>
-                <a:latin typeface="Arial"/>
+                  <a:srgbClr val="1B1A17"/>
+                </a:solidFill>
+                <a:latin typeface="Verdana"/>
               </a:rPr>
               <a:t>•  Nobody behind a swinging pick</a:t>
             </a:r>
@@ -11381,9 +11381,9 @@
             <a:r>
               <a:rPr sz="2400" b="0">
                 <a:solidFill>
-                  <a:srgbClr val="20190F"/>
-                </a:solidFill>
-                <a:latin typeface="Arial"/>
+                  <a:srgbClr val="1B1A17"/>
+                </a:solidFill>
+                <a:latin typeface="Verdana"/>
               </a:rPr>
               <a:t>•  Swap jobs every 10 minutes · drink water</a:t>
             </a:r>
@@ -11405,11 +11405,11 @@
             <a:avLst/>
           </a:prstGeom>
           <a:solidFill>
-            <a:srgbClr val="FBF6EC"/>
+            <a:srgbClr val="EFE6D2"/>
           </a:solidFill>
           <a:ln w="15875">
             <a:solidFill>
-              <a:srgbClr val="E2D8C4"/>
+              <a:srgbClr val="2F5D34"/>
             </a:solidFill>
           </a:ln>
           <a:effectLst/>
@@ -11466,9 +11466,9 @@
             <a:r>
               <a:rPr sz="1200" b="1">
                 <a:solidFill>
-                  <a:srgbClr val="C07A1E"/>
-                </a:solidFill>
-                <a:latin typeface="Arial"/>
+                  <a:srgbClr val="B24E2A"/>
+                </a:solidFill>
+                <a:latin typeface="Verdana"/>
               </a:rPr>
               <a:t>IMAGE · F-IMG-08 · coming</a:t>
             </a:r>
@@ -11505,9 +11505,9 @@
             <a:r>
               <a:rPr sz="1800" b="1">
                 <a:solidFill>
-                  <a:srgbClr val="1F4D2B"/>
-                </a:solidFill>
-                <a:latin typeface="Georgia"/>
+                  <a:srgbClr val="1B1A17"/>
+                </a:solidFill>
+                <a:latin typeface="Rockwell"/>
               </a:rPr>
               <a:t>Tool safety</a:t>
             </a:r>
@@ -11544,9 +11544,9 @@
             <a:r>
               <a:rPr sz="1100" b="0">
                 <a:solidFill>
-                  <a:srgbClr val="20190F"/>
-                </a:solidFill>
-                <a:latin typeface="Arial"/>
+                  <a:srgbClr val="1B1A17"/>
+                </a:solidFill>
+                <a:latin typeface="Verdana"/>
               </a:rPr>
               <a:t>A person carrying a spade and a pick with the points down; another person standing well to the side of someone swinging a mattock; a water bottle in the shade.</a:t>
             </a:r>
@@ -11567,7 +11567,7 @@
     <p:bg>
       <p:bgPr>
         <a:solidFill>
-          <a:srgbClr val="F7F2E9"/>
+          <a:srgbClr val="EFE6D2"/>
         </a:solidFill>
         <a:effectLst/>
       </p:bgPr>
@@ -11609,9 +11609,9 @@
             <a:r>
               <a:rPr sz="1000" b="0">
                 <a:solidFill>
-                  <a:srgbClr val="6B6255"/>
-                </a:solidFill>
-                <a:latin typeface="Arial"/>
+                  <a:srgbClr val="1B1A17"/>
+                </a:solidFill>
+                <a:latin typeface="Verdana"/>
               </a:rPr>
               <a:t>F-D2-07   ·   Poster F-P09</a:t>
             </a:r>
@@ -11648,9 +11648,9 @@
             <a:r>
               <a:rPr sz="1000" b="0">
                 <a:solidFill>
-                  <a:srgbClr val="6B6255"/>
-                </a:solidFill>
-                <a:latin typeface="Arial"/>
+                  <a:srgbClr val="1B1A17"/>
+                </a:solidFill>
+                <a:latin typeface="Verdana"/>
               </a:rPr>
               <a:t>Grow Food, Grow Strong</a:t>
             </a:r>
@@ -11687,9 +11687,9 @@
             <a:r>
               <a:rPr sz="3800" b="1">
                 <a:solidFill>
-                  <a:srgbClr val="1F4D2B"/>
-                </a:solidFill>
-                <a:latin typeface="Georgia"/>
+                  <a:srgbClr val="1B1A17"/>
+                </a:solidFill>
+                <a:latin typeface="Rockwell"/>
               </a:rPr>
               <a:t>A swale on the level line</a:t>
             </a:r>
@@ -11711,7 +11711,7 @@
             <a:avLst/>
           </a:prstGeom>
           <a:solidFill>
-            <a:srgbClr val="E2D8C4"/>
+            <a:srgbClr val="2F5D34"/>
           </a:solidFill>
           <a:ln>
             <a:noFill/>
@@ -11770,9 +11770,9 @@
             <a:r>
               <a:rPr sz="2800" b="0">
                 <a:solidFill>
-                  <a:srgbClr val="20190F"/>
-                </a:solidFill>
-                <a:latin typeface="Arial"/>
+                  <a:srgbClr val="1B1A17"/>
+                </a:solidFill>
+                <a:latin typeface="Verdana"/>
               </a:rPr>
               <a:t>•  Ditch on the level line</a:t>
             </a:r>
@@ -11786,9 +11786,9 @@
             <a:r>
               <a:rPr sz="2800" b="0">
                 <a:solidFill>
-                  <a:srgbClr val="20190F"/>
-                </a:solidFill>
-                <a:latin typeface="Arial"/>
+                  <a:srgbClr val="1B1A17"/>
+                </a:solidFill>
+                <a:latin typeface="Verdana"/>
               </a:rPr>
               <a:t>•  Soil below as a mound</a:t>
             </a:r>
@@ -11802,9 +11802,9 @@
             <a:r>
               <a:rPr sz="2800" b="0">
                 <a:solidFill>
-                  <a:srgbClr val="20190F"/>
-                </a:solidFill>
-                <a:latin typeface="Arial"/>
+                  <a:srgbClr val="1B1A17"/>
+                </a:solidFill>
+                <a:latin typeface="Verdana"/>
               </a:rPr>
               <a:t>•  Safe spillway at the end</a:t>
             </a:r>
@@ -11826,11 +11826,11 @@
             <a:avLst/>
           </a:prstGeom>
           <a:solidFill>
-            <a:srgbClr val="FBF6EC"/>
+            <a:srgbClr val="EFE6D2"/>
           </a:solidFill>
           <a:ln w="15875">
             <a:solidFill>
-              <a:srgbClr val="E2D8C4"/>
+              <a:srgbClr val="2F5D34"/>
             </a:solidFill>
           </a:ln>
           <a:effectLst/>
@@ -11887,9 +11887,9 @@
             <a:r>
               <a:rPr sz="1200" b="1">
                 <a:solidFill>
-                  <a:srgbClr val="C07A1E"/>
-                </a:solidFill>
-                <a:latin typeface="Arial"/>
+                  <a:srgbClr val="B24E2A"/>
+                </a:solidFill>
+                <a:latin typeface="Verdana"/>
               </a:rPr>
               <a:t>POSTER ART · F-P09-ART · coming</a:t>
             </a:r>
@@ -11926,9 +11926,9 @@
             <a:r>
               <a:rPr sz="1800" b="1">
                 <a:solidFill>
-                  <a:srgbClr val="1F4D2B"/>
-                </a:solidFill>
-                <a:latin typeface="Georgia"/>
+                  <a:srgbClr val="1B1A17"/>
+                </a:solidFill>
+                <a:latin typeface="Rockwell"/>
               </a:rPr>
               <a:t>Artwork for F-P09 · A swale on the level line</a:t>
             </a:r>
@@ -11965,9 +11965,9 @@
             <a:r>
               <a:rPr sz="1100" b="0">
                 <a:solidFill>
-                  <a:srgbClr val="20190F"/>
-                </a:solidFill>
-                <a:latin typeface="Arial"/>
+                  <a:srgbClr val="1B1A17"/>
+                </a:solidFill>
+                <a:latin typeface="Verdana"/>
               </a:rPr>
               <a:t>A large cross-section of a slope (uphill on the left). A trench on the level line (about 40 cm wide, 30 cm deep) with water standing in it and blue arrows soaking down and sideways under the mound; the dug soil forms a mound on the DOWNHILL side, mulched with grass and planted with a small tree and bushes whose roots reach towards the wet zone. Rain…</a:t>
             </a:r>
@@ -11988,7 +11988,7 @@
     <p:bg>
       <p:bgPr>
         <a:solidFill>
-          <a:srgbClr val="F7F2E9"/>
+          <a:srgbClr val="EFE6D2"/>
         </a:solidFill>
         <a:effectLst/>
       </p:bgPr>
@@ -12030,9 +12030,9 @@
             <a:r>
               <a:rPr sz="1000" b="0">
                 <a:solidFill>
-                  <a:srgbClr val="6B6255"/>
-                </a:solidFill>
-                <a:latin typeface="Arial"/>
+                  <a:srgbClr val="1B1A17"/>
+                </a:solidFill>
+                <a:latin typeface="Verdana"/>
               </a:rPr>
               <a:t>F-D2-08   ·   Poster F-P06</a:t>
             </a:r>
@@ -12069,9 +12069,9 @@
             <a:r>
               <a:rPr sz="1000" b="0">
                 <a:solidFill>
-                  <a:srgbClr val="6B6255"/>
-                </a:solidFill>
-                <a:latin typeface="Arial"/>
+                  <a:srgbClr val="1B1A17"/>
+                </a:solidFill>
+                <a:latin typeface="Verdana"/>
               </a:rPr>
               <a:t>Grow Food, Grow Strong</a:t>
             </a:r>
@@ -12093,7 +12093,7 @@
             <a:avLst/>
           </a:prstGeom>
           <a:solidFill>
-            <a:srgbClr val="C07A1E"/>
+            <a:srgbClr val="B24E2A"/>
           </a:solidFill>
           <a:ln>
             <a:noFill/>
@@ -12152,9 +12152,9 @@
             <a:r>
               <a:rPr sz="1400" b="1">
                 <a:solidFill>
-                  <a:srgbClr val="F7F2E9"/>
-                </a:solidFill>
-                <a:latin typeface="Arial"/>
+                  <a:srgbClr val="EFE6D2"/>
+                </a:solidFill>
+                <a:latin typeface="Verdana"/>
               </a:rPr>
               <a:t>YOUR TURN</a:t>
             </a:r>
@@ -12191,9 +12191,9 @@
             <a:r>
               <a:rPr sz="3800" b="1">
                 <a:solidFill>
-                  <a:srgbClr val="1F4D2B"/>
-                </a:solidFill>
-                <a:latin typeface="Georgia"/>
+                  <a:srgbClr val="1B1A17"/>
+                </a:solidFill>
+                <a:latin typeface="Rockwell"/>
               </a:rPr>
               <a:t>Mark the contour</a:t>
             </a:r>
@@ -12215,7 +12215,7 @@
             <a:avLst/>
           </a:prstGeom>
           <a:solidFill>
-            <a:srgbClr val="E2D8C4"/>
+            <a:srgbClr val="2F5D34"/>
           </a:solidFill>
           <a:ln>
             <a:noFill/>
@@ -12274,9 +12274,9 @@
             <a:r>
               <a:rPr sz="2600" b="1">
                 <a:solidFill>
-                  <a:srgbClr val="20190F"/>
-                </a:solidFill>
-                <a:latin typeface="Arial"/>
+                  <a:srgbClr val="1B1A17"/>
+                </a:solidFill>
+                <a:latin typeface="Verdana"/>
               </a:rPr>
               <a:t>•  One foot on the peg</a:t>
             </a:r>
@@ -12290,9 +12290,9 @@
             <a:r>
               <a:rPr sz="2600" b="1">
                 <a:solidFill>
-                  <a:srgbClr val="20190F"/>
-                </a:solidFill>
-                <a:latin typeface="Arial"/>
+                  <a:srgbClr val="1B1A17"/>
+                </a:solidFill>
+                <a:latin typeface="Verdana"/>
               </a:rPr>
               <a:t>•  Swing until the string hits the middle</a:t>
             </a:r>
@@ -12306,9 +12306,9 @@
             <a:r>
               <a:rPr sz="2600" b="1">
                 <a:solidFill>
-                  <a:srgbClr val="20190F"/>
-                </a:solidFill>
-                <a:latin typeface="Arial"/>
+                  <a:srgbClr val="1B1A17"/>
+                </a:solidFill>
+                <a:latin typeface="Verdana"/>
               </a:rPr>
               <a:t>•  Peg · move · repeat</a:t>
             </a:r>
@@ -12354,7 +12354,7 @@
             <a:avLst/>
           </a:prstGeom>
           <a:solidFill>
-            <a:srgbClr val="20190F"/>
+            <a:srgbClr val="1B1A17"/>
           </a:solidFill>
           <a:ln>
             <a:noFill/>
@@ -12413,9 +12413,9 @@
             <a:r>
               <a:rPr sz="1100" b="0">
                 <a:solidFill>
-                  <a:srgbClr val="F7F2E9"/>
-                </a:solidFill>
-                <a:latin typeface="Arial"/>
+                  <a:srgbClr val="EFE6D2"/>
+                </a:solidFill>
+                <a:latin typeface="Verdana"/>
               </a:rPr>
               <a:t>▶  Clip F-ANI-06 · play from the tablet: flow-a-frame.mp4</a:t>
             </a:r>
@@ -12436,7 +12436,7 @@
     <p:bg>
       <p:bgPr>
         <a:solidFill>
-          <a:srgbClr val="F7F2E9"/>
+          <a:srgbClr val="EFE6D2"/>
         </a:solidFill>
         <a:effectLst/>
       </p:bgPr>
@@ -12478,9 +12478,9 @@
             <a:r>
               <a:rPr sz="1000" b="0">
                 <a:solidFill>
-                  <a:srgbClr val="6B6255"/>
-                </a:solidFill>
-                <a:latin typeface="Arial"/>
+                  <a:srgbClr val="1B1A17"/>
+                </a:solidFill>
+                <a:latin typeface="Verdana"/>
               </a:rPr>
               <a:t>F-D2-09   ·   Poster F-P09</a:t>
             </a:r>
@@ -12517,9 +12517,9 @@
             <a:r>
               <a:rPr sz="1000" b="0">
                 <a:solidFill>
-                  <a:srgbClr val="6B6255"/>
-                </a:solidFill>
-                <a:latin typeface="Arial"/>
+                  <a:srgbClr val="1B1A17"/>
+                </a:solidFill>
+                <a:latin typeface="Verdana"/>
               </a:rPr>
               <a:t>Grow Food, Grow Strong</a:t>
             </a:r>
@@ -12541,7 +12541,7 @@
             <a:avLst/>
           </a:prstGeom>
           <a:solidFill>
-            <a:srgbClr val="C07A1E"/>
+            <a:srgbClr val="B24E2A"/>
           </a:solidFill>
           <a:ln>
             <a:noFill/>
@@ -12600,9 +12600,9 @@
             <a:r>
               <a:rPr sz="1400" b="1">
                 <a:solidFill>
-                  <a:srgbClr val="F7F2E9"/>
-                </a:solidFill>
-                <a:latin typeface="Arial"/>
+                  <a:srgbClr val="EFE6D2"/>
+                </a:solidFill>
+                <a:latin typeface="Verdana"/>
               </a:rPr>
               <a:t>YOUR TURN</a:t>
             </a:r>
@@ -12639,9 +12639,9 @@
             <a:r>
               <a:rPr sz="3800" b="1">
                 <a:solidFill>
-                  <a:srgbClr val="1F4D2B"/>
-                </a:solidFill>
-                <a:latin typeface="Georgia"/>
+                  <a:srgbClr val="1B1A17"/>
+                </a:solidFill>
+                <a:latin typeface="Rockwell"/>
               </a:rPr>
               <a:t>Dig</a:t>
             </a:r>
@@ -12663,7 +12663,7 @@
             <a:avLst/>
           </a:prstGeom>
           <a:solidFill>
-            <a:srgbClr val="E2D8C4"/>
+            <a:srgbClr val="2F5D34"/>
           </a:solidFill>
           <a:ln>
             <a:noFill/>
@@ -12722,9 +12722,9 @@
             <a:r>
               <a:rPr sz="3000" b="1">
                 <a:solidFill>
-                  <a:srgbClr val="20190F"/>
-                </a:solidFill>
-                <a:latin typeface="Arial"/>
+                  <a:srgbClr val="1B1A17"/>
+                </a:solidFill>
+                <a:latin typeface="Verdana"/>
               </a:rPr>
               <a:t>•  Ditch above the pegs</a:t>
             </a:r>
@@ -12738,9 +12738,9 @@
             <a:r>
               <a:rPr sz="3000" b="1">
                 <a:solidFill>
-                  <a:srgbClr val="20190F"/>
-                </a:solidFill>
-                <a:latin typeface="Arial"/>
+                  <a:srgbClr val="1B1A17"/>
+                </a:solidFill>
+                <a:latin typeface="Verdana"/>
               </a:rPr>
               <a:t>•  Soil downhill</a:t>
             </a:r>
@@ -12754,9 +12754,9 @@
             <a:r>
               <a:rPr sz="3000" b="1">
                 <a:solidFill>
-                  <a:srgbClr val="20190F"/>
-                </a:solidFill>
-                <a:latin typeface="Arial"/>
+                  <a:srgbClr val="1B1A17"/>
+                </a:solidFill>
+                <a:latin typeface="Verdana"/>
               </a:rPr>
               <a:t>•  Keep the bottom flat</a:t>
             </a:r>
@@ -12778,11 +12778,11 @@
             <a:avLst/>
           </a:prstGeom>
           <a:solidFill>
-            <a:srgbClr val="FBF6EC"/>
+            <a:srgbClr val="EFE6D2"/>
           </a:solidFill>
           <a:ln w="15875">
             <a:solidFill>
-              <a:srgbClr val="E2D8C4"/>
+              <a:srgbClr val="2F5D34"/>
             </a:solidFill>
           </a:ln>
           <a:effectLst/>
@@ -12839,9 +12839,9 @@
             <a:r>
               <a:rPr sz="1200" b="1">
                 <a:solidFill>
-                  <a:srgbClr val="C07A1E"/>
-                </a:solidFill>
-                <a:latin typeface="Arial"/>
+                  <a:srgbClr val="B24E2A"/>
+                </a:solidFill>
+                <a:latin typeface="Verdana"/>
               </a:rPr>
               <a:t>IMAGE · F-IMG-09 · coming</a:t>
             </a:r>
@@ -12878,9 +12878,9 @@
             <a:r>
               <a:rPr sz="1800" b="1">
                 <a:solidFill>
-                  <a:srgbClr val="1F4D2B"/>
-                </a:solidFill>
-                <a:latin typeface="Georgia"/>
+                  <a:srgbClr val="1B1A17"/>
+                </a:solidFill>
+                <a:latin typeface="Rockwell"/>
               </a:rPr>
               <a:t>Digging the swale</a:t>
             </a:r>
@@ -12917,9 +12917,9 @@
             <a:r>
               <a:rPr sz="1100" b="0">
                 <a:solidFill>
-                  <a:srgbClr val="20190F"/>
-                </a:solidFill>
-                <a:latin typeface="Arial"/>
+                  <a:srgbClr val="1B1A17"/>
+                </a:solidFill>
+                <a:latin typeface="Verdana"/>
               </a:rPr>
               <a:t>Five learners on a contour line of pegs: two digging the ditch uphill of the pegs, one raking soil into a mound downhill, one measuring depth with a marked stick, one bringing water.</a:t>
             </a:r>

--- a/courses/build/farmer-5day/F-D2.pptx
+++ b/courses/build/farmer-5day/F-D2.pptx
@@ -899,7 +899,7 @@
           </a:p>
           <a:p>
             <a:r>
-              <a:t>Clip F-ANI-10: public/course-animations/water-harvesting/watch-16-first-flush-tank.mp4</a:t>
+              <a:t>Clip F-ANI-10: public/course-media/farmer-5day/F-ANI-10.mp4</a:t>
             </a:r>
           </a:p>
         </p:txBody>
@@ -1115,7 +1115,7 @@
           <a:p/>
           <a:p>
             <a:r>
-              <a:t>Clip F-ANI-12: public/course-animations/soil-health/watch-14-mulch-protection.mp4</a:t>
+              <a:t>Clip F-ANI-12: public/course-animations/food-forest/flow-sheet-mulching.mp4</a:t>
             </a:r>
           </a:p>
         </p:txBody>
@@ -1196,7 +1196,7 @@
           </a:p>
           <a:p>
             <a:r>
-              <a:t>Clip F-ANI-11: public/course-animations/water-harvesting/watch-21-greywater-mulch.mp4</a:t>
+              <a:t>Clip F-ANI-11: public/course-media/farmer-5day/F-ANI-11.mp4</a:t>
             </a:r>
           </a:p>
         </p:txBody>
@@ -7251,49 +7251,27 @@
           </a:p>
         </p:txBody>
       </p:sp>
-      <p:pic>
-        <p:nvPicPr>
-          <p:cNvPr id="7" name="Picture 6" descr="watch-16-first-flush-tank.jpg"/>
-          <p:cNvPicPr>
-            <a:picLocks noChangeAspect="1"/>
-          </p:cNvPicPr>
-          <p:nvPr/>
-        </p:nvPicPr>
-        <p:blipFill>
-          <a:blip r:embed="rId2"/>
-          <a:stretch>
-            <a:fillRect/>
-          </a:stretch>
-        </p:blipFill>
-        <p:spPr>
-          <a:xfrm>
-            <a:off x="6188202" y="1691640"/>
-            <a:ext cx="5180076" cy="4526280"/>
-          </a:xfrm>
-          <a:prstGeom prst="rect">
-            <a:avLst/>
-          </a:prstGeom>
-        </p:spPr>
-      </p:pic>
-      <p:sp>
-        <p:nvSpPr>
-          <p:cNvPr id="8" name="Rectangle 7"/>
+      <p:sp>
+        <p:nvSpPr>
+          <p:cNvPr id="7" name="Rectangle 6"/>
           <p:cNvSpPr/>
           <p:nvPr/>
         </p:nvSpPr>
         <p:spPr>
           <a:xfrm>
-            <a:off x="5852160" y="5806440"/>
-            <a:ext cx="5852160" cy="411480"/>
+            <a:off x="5852160" y="1691640"/>
+            <a:ext cx="5852160" cy="4526280"/>
           </a:xfrm>
           <a:prstGeom prst="rect">
             <a:avLst/>
           </a:prstGeom>
           <a:solidFill>
-            <a:srgbClr val="1B1A17"/>
+            <a:srgbClr val="EFE6D2"/>
           </a:solidFill>
-          <a:ln>
-            <a:noFill/>
+          <a:ln w="15875">
+            <a:solidFill>
+              <a:srgbClr val="2F5D34"/>
+            </a:solidFill>
           </a:ln>
           <a:effectLst/>
         </p:spPr>
@@ -7321,14 +7299,53 @@
       </p:sp>
       <p:sp>
         <p:nvSpPr>
+          <p:cNvPr id="8" name="TextBox 7"/>
+          <p:cNvSpPr txBox="1"/>
+          <p:nvPr/>
+        </p:nvSpPr>
+        <p:spPr>
+          <a:xfrm>
+            <a:off x="6080760" y="1874520"/>
+            <a:ext cx="5394960" cy="365760"/>
+          </a:xfrm>
+          <a:prstGeom prst="rect">
+            <a:avLst/>
+          </a:prstGeom>
+          <a:noFill/>
+        </p:spPr>
+        <p:txBody>
+          <a:bodyPr wrap="square" anchor="t" lIns="45720" rIns="45720">
+            <a:spAutoFit/>
+          </a:bodyPr>
+          <a:lstStyle/>
+          <a:p>
+            <a:pPr algn="l">
+              <a:spcAft>
+                <a:spcPts val="800"/>
+              </a:spcAft>
+            </a:pPr>
+            <a:r>
+              <a:rPr sz="1200" b="1">
+                <a:solidFill>
+                  <a:srgbClr val="B24E2A"/>
+                </a:solidFill>
+                <a:latin typeface="Verdana"/>
+              </a:rPr>
+              <a:t>ANIMATION · F-ANI-10 · coming</a:t>
+            </a:r>
+          </a:p>
+        </p:txBody>
+      </p:sp>
+      <p:sp>
+        <p:nvSpPr>
           <p:cNvPr id="9" name="TextBox 8"/>
           <p:cNvSpPr txBox="1"/>
           <p:nvPr/>
         </p:nvSpPr>
         <p:spPr>
           <a:xfrm>
-            <a:off x="5943600" y="5815584"/>
-            <a:ext cx="5669280" cy="384048"/>
+            <a:off x="6080760" y="2258568"/>
+            <a:ext cx="5394960" cy="457200"/>
           </a:xfrm>
           <a:prstGeom prst="rect">
             <a:avLst/>
@@ -7336,7 +7353,7 @@
           <a:noFill/>
         </p:spPr>
         <p:txBody>
-          <a:bodyPr wrap="square" anchor="ctr" lIns="45720" rIns="45720">
+          <a:bodyPr wrap="square" anchor="t" lIns="45720" rIns="45720">
             <a:spAutoFit/>
           </a:bodyPr>
           <a:lstStyle/>
@@ -7347,13 +7364,52 @@
               </a:spcAft>
             </a:pPr>
             <a:r>
+              <a:rPr sz="1800" b="1">
+                <a:solidFill>
+                  <a:srgbClr val="1B1A17"/>
+                </a:solidFill>
+                <a:latin typeface="Rockwell"/>
+              </a:rPr>
+              <a:t>First-flush tank</a:t>
+            </a:r>
+          </a:p>
+        </p:txBody>
+      </p:sp>
+      <p:sp>
+        <p:nvSpPr>
+          <p:cNvPr id="10" name="TextBox 9"/>
+          <p:cNvSpPr txBox="1"/>
+          <p:nvPr/>
+        </p:nvSpPr>
+        <p:spPr>
+          <a:xfrm>
+            <a:off x="6080760" y="2788920"/>
+            <a:ext cx="5394960" cy="3246120"/>
+          </a:xfrm>
+          <a:prstGeom prst="rect">
+            <a:avLst/>
+          </a:prstGeom>
+          <a:noFill/>
+        </p:spPr>
+        <p:txBody>
+          <a:bodyPr wrap="square" anchor="t" lIns="45720" rIns="45720">
+            <a:spAutoFit/>
+          </a:bodyPr>
+          <a:lstStyle/>
+          <a:p>
+            <a:pPr algn="l">
+              <a:spcAft>
+                <a:spcPts val="800"/>
+              </a:spcAft>
+            </a:pPr>
+            <a:r>
               <a:rPr sz="1100" b="0">
                 <a:solidFill>
-                  <a:srgbClr val="EFE6D2"/>
+                  <a:srgbClr val="1B1A17"/>
                 </a:solidFill>
                 <a:latin typeface="Verdana"/>
               </a:rPr>
-              <a:t>▶  Clip F-ANI-10 · play from the tablet: watch-16-first-flush-tank.mp4</a:t>
+              <a:t>Rain on a corrugated-iron roof. The first dirty water (leaves, dust) fills a vertical side pipe until it is full; then clean water flows past it into a covered round tank; the tank fills and the overflow pipe sends water to a planted swale. (Replaces the withdrawn clip `water-harvesting/watch-16-first-flush-tank.mp4`.)</a:t>
             </a:r>
           </a:p>
         </p:txBody>
@@ -8511,7 +8567,7 @@
       </p:sp>
       <p:pic>
         <p:nvPicPr>
-          <p:cNvPr id="7" name="Picture 6" descr="watch-14-mulch-protection.jpg"/>
+          <p:cNvPr id="7" name="Picture 6" descr="flow-sheet-mulching.jpg"/>
           <p:cNvPicPr>
             <a:picLocks noChangeAspect="1"/>
           </p:cNvPicPr>
@@ -8611,7 +8667,7 @@
                 </a:solidFill>
                 <a:latin typeface="Verdana"/>
               </a:rPr>
-              <a:t>▶  Clip F-ANI-12 · play from the tablet: watch-14-mulch-protection.mp4</a:t>
+              <a:t>▶  Clip F-ANI-12 · play from the tablet: flow-sheet-mulching.mp4</a:t>
             </a:r>
           </a:p>
         </p:txBody>
@@ -8874,49 +8930,27 @@
           </a:p>
         </p:txBody>
       </p:sp>
-      <p:pic>
-        <p:nvPicPr>
-          <p:cNvPr id="7" name="Picture 6" descr="watch-21-greywater-mulch.jpg"/>
-          <p:cNvPicPr>
-            <a:picLocks noChangeAspect="1"/>
-          </p:cNvPicPr>
-          <p:nvPr/>
-        </p:nvPicPr>
-        <p:blipFill>
-          <a:blip r:embed="rId2"/>
-          <a:stretch>
-            <a:fillRect/>
-          </a:stretch>
-        </p:blipFill>
-        <p:spPr>
-          <a:xfrm>
-            <a:off x="6188202" y="1691640"/>
-            <a:ext cx="5180076" cy="4526280"/>
-          </a:xfrm>
-          <a:prstGeom prst="rect">
-            <a:avLst/>
-          </a:prstGeom>
-        </p:spPr>
-      </p:pic>
-      <p:sp>
-        <p:nvSpPr>
-          <p:cNvPr id="8" name="Rectangle 7"/>
+      <p:sp>
+        <p:nvSpPr>
+          <p:cNvPr id="7" name="Rectangle 6"/>
           <p:cNvSpPr/>
           <p:nvPr/>
         </p:nvSpPr>
         <p:spPr>
           <a:xfrm>
-            <a:off x="5852160" y="5806440"/>
-            <a:ext cx="5852160" cy="411480"/>
+            <a:off x="5852160" y="1691640"/>
+            <a:ext cx="5852160" cy="4526280"/>
           </a:xfrm>
           <a:prstGeom prst="rect">
             <a:avLst/>
           </a:prstGeom>
           <a:solidFill>
-            <a:srgbClr val="1B1A17"/>
+            <a:srgbClr val="EFE6D2"/>
           </a:solidFill>
-          <a:ln>
-            <a:noFill/>
+          <a:ln w="15875">
+            <a:solidFill>
+              <a:srgbClr val="2F5D34"/>
+            </a:solidFill>
           </a:ln>
           <a:effectLst/>
         </p:spPr>
@@ -8944,14 +8978,53 @@
       </p:sp>
       <p:sp>
         <p:nvSpPr>
+          <p:cNvPr id="8" name="TextBox 7"/>
+          <p:cNvSpPr txBox="1"/>
+          <p:nvPr/>
+        </p:nvSpPr>
+        <p:spPr>
+          <a:xfrm>
+            <a:off x="6080760" y="1874520"/>
+            <a:ext cx="5394960" cy="365760"/>
+          </a:xfrm>
+          <a:prstGeom prst="rect">
+            <a:avLst/>
+          </a:prstGeom>
+          <a:noFill/>
+        </p:spPr>
+        <p:txBody>
+          <a:bodyPr wrap="square" anchor="t" lIns="45720" rIns="45720">
+            <a:spAutoFit/>
+          </a:bodyPr>
+          <a:lstStyle/>
+          <a:p>
+            <a:pPr algn="l">
+              <a:spcAft>
+                <a:spcPts val="800"/>
+              </a:spcAft>
+            </a:pPr>
+            <a:r>
+              <a:rPr sz="1200" b="1">
+                <a:solidFill>
+                  <a:srgbClr val="B24E2A"/>
+                </a:solidFill>
+                <a:latin typeface="Verdana"/>
+              </a:rPr>
+              <a:t>ANIMATION · F-ANI-11 · coming</a:t>
+            </a:r>
+          </a:p>
+        </p:txBody>
+      </p:sp>
+      <p:sp>
+        <p:nvSpPr>
           <p:cNvPr id="9" name="TextBox 8"/>
           <p:cNvSpPr txBox="1"/>
           <p:nvPr/>
         </p:nvSpPr>
         <p:spPr>
           <a:xfrm>
-            <a:off x="5943600" y="5815584"/>
-            <a:ext cx="5669280" cy="384048"/>
+            <a:off x="6080760" y="2258568"/>
+            <a:ext cx="5394960" cy="457200"/>
           </a:xfrm>
           <a:prstGeom prst="rect">
             <a:avLst/>
@@ -8959,7 +9032,7 @@
           <a:noFill/>
         </p:spPr>
         <p:txBody>
-          <a:bodyPr wrap="square" anchor="ctr" lIns="45720" rIns="45720">
+          <a:bodyPr wrap="square" anchor="t" lIns="45720" rIns="45720">
             <a:spAutoFit/>
           </a:bodyPr>
           <a:lstStyle/>
@@ -8970,13 +9043,52 @@
               </a:spcAft>
             </a:pPr>
             <a:r>
+              <a:rPr sz="1800" b="1">
+                <a:solidFill>
+                  <a:srgbClr val="1B1A17"/>
+                </a:solidFill>
+                <a:latin typeface="Rockwell"/>
+              </a:rPr>
+              <a:t>Greywater to mulch</a:t>
+            </a:r>
+          </a:p>
+        </p:txBody>
+      </p:sp>
+      <p:sp>
+        <p:nvSpPr>
+          <p:cNvPr id="10" name="TextBox 9"/>
+          <p:cNvSpPr txBox="1"/>
+          <p:nvPr/>
+        </p:nvSpPr>
+        <p:spPr>
+          <a:xfrm>
+            <a:off x="6080760" y="2788920"/>
+            <a:ext cx="5394960" cy="3246120"/>
+          </a:xfrm>
+          <a:prstGeom prst="rect">
+            <a:avLst/>
+          </a:prstGeom>
+          <a:noFill/>
+        </p:spPr>
+        <p:txBody>
+          <a:bodyPr wrap="square" anchor="t" lIns="45720" rIns="45720">
+            <a:spAutoFit/>
+          </a:bodyPr>
+          <a:lstStyle/>
+          <a:p>
+            <a:pPr algn="l">
+              <a:spcAft>
+                <a:spcPts val="800"/>
+              </a:spcAft>
+            </a:pPr>
+            <a:r>
               <a:rPr sz="1100" b="0">
                 <a:solidFill>
-                  <a:srgbClr val="EFE6D2"/>
+                  <a:srgbClr val="1B1A17"/>
                 </a:solidFill>
                 <a:latin typeface="Verdana"/>
               </a:rPr>
-              <a:t>▶  Clip F-ANI-11 · play from the tablet: watch-21-greywater-mulch.mp4</a:t>
+              <a:t>A person carries a basin of used washing water and pours it slowly onto a thick mulch ring around a broad-leaved banana-like plant and a fruit tree (never onto leafy vegetables); in cut-away the water soaks through the mulch down to the roots. (Replaces the withdrawn clip `water-harvesting/watch-21-greywater-mulch.mp4`.)</a:t>
             </a:r>
           </a:p>
         </p:txBody>
